--- a/airflow/Airflow.pptx
+++ b/airflow/Airflow.pptx
@@ -18,7 +18,19 @@
     <p:sldId id="316" r:id="rId12"/>
     <p:sldId id="317" r:id="rId13"/>
     <p:sldId id="318" r:id="rId14"/>
-    <p:sldId id="262" r:id="rId15"/>
+    <p:sldId id="327" r:id="rId15"/>
+    <p:sldId id="319" r:id="rId16"/>
+    <p:sldId id="320" r:id="rId17"/>
+    <p:sldId id="321" r:id="rId18"/>
+    <p:sldId id="322" r:id="rId19"/>
+    <p:sldId id="323" r:id="rId20"/>
+    <p:sldId id="324" r:id="rId21"/>
+    <p:sldId id="325" r:id="rId22"/>
+    <p:sldId id="326" r:id="rId23"/>
+    <p:sldId id="328" r:id="rId24"/>
+    <p:sldId id="329" r:id="rId25"/>
+    <p:sldId id="330" r:id="rId26"/>
+    <p:sldId id="262" r:id="rId27"/>
   </p:sldIdLst>
   <p:sldSz cx="12192000" cy="6858000"/>
   <p:notesSz cx="6858000" cy="9144000"/>
@@ -385,7 +397,7 @@
             <a:fld id="{B61BEF0D-F0BB-DE4B-95CE-6DB70DBA9567}" type="datetimeFigureOut">
               <a:rPr lang="en-US" dirty="0"/>
               <a:pPr/>
-              <a:t>7/30/2026</a:t>
+              <a:t>7/31/2026</a:t>
             </a:fld>
             <a:endParaRPr lang="en-US" dirty="0"/>
           </a:p>
@@ -647,7 +659,7 @@
             <a:fld id="{B61BEF0D-F0BB-DE4B-95CE-6DB70DBA9567}" type="datetimeFigureOut">
               <a:rPr lang="en-US" dirty="0"/>
               <a:pPr/>
-              <a:t>7/30/2026</a:t>
+              <a:t>7/31/2026</a:t>
             </a:fld>
             <a:endParaRPr lang="en-US" dirty="0"/>
           </a:p>
@@ -882,7 +894,7 @@
             <a:fld id="{B61BEF0D-F0BB-DE4B-95CE-6DB70DBA9567}" type="datetimeFigureOut">
               <a:rPr lang="en-US" dirty="0"/>
               <a:pPr/>
-              <a:t>7/30/2026</a:t>
+              <a:t>7/31/2026</a:t>
             </a:fld>
             <a:endParaRPr lang="en-US" dirty="0"/>
           </a:p>
@@ -1129,7 +1141,7 @@
             <a:fld id="{B61BEF0D-F0BB-DE4B-95CE-6DB70DBA9567}" type="datetimeFigureOut">
               <a:rPr lang="en-US" dirty="0"/>
               <a:pPr/>
-              <a:t>7/30/2026</a:t>
+              <a:t>7/31/2026</a:t>
             </a:fld>
             <a:endParaRPr lang="en-US" dirty="0"/>
           </a:p>
@@ -1437,7 +1449,7 @@
             <a:fld id="{B61BEF0D-F0BB-DE4B-95CE-6DB70DBA9567}" type="datetimeFigureOut">
               <a:rPr lang="en-US" dirty="0"/>
               <a:pPr/>
-              <a:t>7/30/2026</a:t>
+              <a:t>7/31/2026</a:t>
             </a:fld>
             <a:endParaRPr lang="en-US" dirty="0"/>
           </a:p>
@@ -1738,7 +1750,7 @@
             <a:fld id="{B61BEF0D-F0BB-DE4B-95CE-6DB70DBA9567}" type="datetimeFigureOut">
               <a:rPr lang="en-US" dirty="0"/>
               <a:pPr/>
-              <a:t>7/30/2026</a:t>
+              <a:t>7/31/2026</a:t>
             </a:fld>
             <a:endParaRPr lang="en-US" dirty="0"/>
           </a:p>
@@ -2159,7 +2171,7 @@
             <a:fld id="{B61BEF0D-F0BB-DE4B-95CE-6DB70DBA9567}" type="datetimeFigureOut">
               <a:rPr lang="en-US" dirty="0"/>
               <a:pPr/>
-              <a:t>7/30/2026</a:t>
+              <a:t>7/31/2026</a:t>
             </a:fld>
             <a:endParaRPr lang="en-US" dirty="0"/>
           </a:p>
@@ -2322,7 +2334,7 @@
             <a:fld id="{B61BEF0D-F0BB-DE4B-95CE-6DB70DBA9567}" type="datetimeFigureOut">
               <a:rPr lang="en-US" dirty="0"/>
               <a:pPr/>
-              <a:t>7/30/2026</a:t>
+              <a:t>7/31/2026</a:t>
             </a:fld>
             <a:endParaRPr lang="en-US" dirty="0"/>
           </a:p>
@@ -2419,7 +2431,7 @@
             <a:fld id="{B61BEF0D-F0BB-DE4B-95CE-6DB70DBA9567}" type="datetimeFigureOut">
               <a:rPr lang="en-US" dirty="0"/>
               <a:pPr/>
-              <a:t>7/30/2026</a:t>
+              <a:t>7/31/2026</a:t>
             </a:fld>
             <a:endParaRPr lang="en-US" dirty="0"/>
           </a:p>
@@ -2797,7 +2809,7 @@
             <a:fld id="{B61BEF0D-F0BB-DE4B-95CE-6DB70DBA9567}" type="datetimeFigureOut">
               <a:rPr lang="en-US" dirty="0"/>
               <a:pPr/>
-              <a:t>7/30/2026</a:t>
+              <a:t>7/31/2026</a:t>
             </a:fld>
             <a:endParaRPr lang="en-US" dirty="0"/>
           </a:p>
@@ -3083,7 +3095,7 @@
             <a:fld id="{B61BEF0D-F0BB-DE4B-95CE-6DB70DBA9567}" type="datetimeFigureOut">
               <a:rPr lang="en-US" dirty="0"/>
               <a:pPr/>
-              <a:t>7/30/2026</a:t>
+              <a:t>7/31/2026</a:t>
             </a:fld>
             <a:endParaRPr lang="en-US" dirty="0"/>
           </a:p>
@@ -3322,7 +3334,7 @@
             <a:fld id="{B61BEF0D-F0BB-DE4B-95CE-6DB70DBA9567}" type="datetimeFigureOut">
               <a:rPr lang="en-US" dirty="0"/>
               <a:pPr/>
-              <a:t>7/30/2026</a:t>
+              <a:t>7/31/2026</a:t>
             </a:fld>
             <a:endParaRPr lang="en-US" dirty="0"/>
           </a:p>
@@ -4583,7 +4595,7 @@
             </a:r>
             <a:r>
               <a:rPr lang="en-US" dirty="0"/>
-              <a:t>-airflow=3.0.0</a:t>
+              <a:t>-airflow==3.0.0</a:t>
             </a:r>
           </a:p>
           <a:p>
@@ -4597,7 +4609,7 @@
             <a:pPr lvl="1"/>
             <a:r>
               <a:rPr lang="en-US" dirty="0"/>
-              <a:t>Airflow UI is exposed at localhost:8080</a:t>
+              <a:t>Airflow UI is exposed at localhost:8080 – the default username=airflow password=airflow</a:t>
             </a:r>
           </a:p>
           <a:p>
@@ -4619,6 +4631,1636 @@
 </file>
 
 <file path=ppt/slides/slide14.xml><?xml version="1.0" encoding="utf-8"?>
+<p:sld xmlns:a="http://schemas.openxmlformats.org/drawingml/2006/main" xmlns:r="http://schemas.openxmlformats.org/officeDocument/2006/relationships" xmlns:p="http://schemas.openxmlformats.org/presentationml/2006/main">
+  <p:cSld>
+    <p:spTree>
+      <p:nvGrpSpPr>
+        <p:cNvPr id="1" name=""/>
+        <p:cNvGrpSpPr/>
+        <p:nvPr/>
+      </p:nvGrpSpPr>
+      <p:grpSpPr>
+        <a:xfrm>
+          <a:off x="0" y="0"/>
+          <a:ext cx="0" cy="0"/>
+          <a:chOff x="0" y="0"/>
+          <a:chExt cx="0" cy="0"/>
+        </a:xfrm>
+      </p:grpSpPr>
+      <p:sp>
+        <p:nvSpPr>
+          <p:cNvPr id="2" name="Title 1">
+            <a:extLst>
+              <a:ext uri="{FF2B5EF4-FFF2-40B4-BE49-F238E27FC236}">
+                <a16:creationId xmlns:a16="http://schemas.microsoft.com/office/drawing/2014/main" id="{FE3D7754-8D0C-8134-87B3-208CA0D73EBD}"/>
+              </a:ext>
+            </a:extLst>
+          </p:cNvPr>
+          <p:cNvSpPr>
+            <a:spLocks noGrp="1"/>
+          </p:cNvSpPr>
+          <p:nvPr>
+            <p:ph type="title"/>
+          </p:nvPr>
+        </p:nvSpPr>
+        <p:spPr/>
+        <p:txBody>
+          <a:bodyPr/>
+          <a:lstStyle/>
+          <a:p>
+            <a:r>
+              <a:rPr lang="en-US" dirty="0"/>
+              <a:t>Our mini-project</a:t>
+            </a:r>
+          </a:p>
+        </p:txBody>
+      </p:sp>
+      <p:sp>
+        <p:nvSpPr>
+          <p:cNvPr id="3" name="Content Placeholder 2">
+            <a:extLst>
+              <a:ext uri="{FF2B5EF4-FFF2-40B4-BE49-F238E27FC236}">
+                <a16:creationId xmlns:a16="http://schemas.microsoft.com/office/drawing/2014/main" id="{CB2A0888-0575-1A29-42E3-4CE83703E2DF}"/>
+              </a:ext>
+            </a:extLst>
+          </p:cNvPr>
+          <p:cNvSpPr>
+            <a:spLocks noGrp="1"/>
+          </p:cNvSpPr>
+          <p:nvPr>
+            <p:ph idx="1"/>
+          </p:nvPr>
+        </p:nvSpPr>
+        <p:spPr>
+          <a:xfrm>
+            <a:off x="581192" y="2180497"/>
+            <a:ext cx="11029615" cy="1714610"/>
+          </a:xfrm>
+        </p:spPr>
+        <p:txBody>
+          <a:bodyPr/>
+          <a:lstStyle/>
+          <a:p>
+            <a:r>
+              <a:rPr lang="en-US" dirty="0"/>
+              <a:t>We will create a multi-step DAG </a:t>
+            </a:r>
+          </a:p>
+        </p:txBody>
+      </p:sp>
+      <p:pic>
+        <p:nvPicPr>
+          <p:cNvPr id="5" name="Picture 4">
+            <a:extLst>
+              <a:ext uri="{FF2B5EF4-FFF2-40B4-BE49-F238E27FC236}">
+                <a16:creationId xmlns:a16="http://schemas.microsoft.com/office/drawing/2014/main" id="{4DA64D30-CBA7-11D5-8431-B296D840392B}"/>
+              </a:ext>
+            </a:extLst>
+          </p:cNvPr>
+          <p:cNvPicPr>
+            <a:picLocks noChangeAspect="1"/>
+          </p:cNvPicPr>
+          <p:nvPr/>
+        </p:nvPicPr>
+        <p:blipFill>
+          <a:blip r:embed="rId2"/>
+          <a:stretch>
+            <a:fillRect/>
+          </a:stretch>
+        </p:blipFill>
+        <p:spPr>
+          <a:xfrm>
+            <a:off x="1099439" y="4127624"/>
+            <a:ext cx="9993120" cy="1476581"/>
+          </a:xfrm>
+          <a:prstGeom prst="rect">
+            <a:avLst/>
+          </a:prstGeom>
+        </p:spPr>
+      </p:pic>
+    </p:spTree>
+    <p:extLst>
+      <p:ext uri="{BB962C8B-B14F-4D97-AF65-F5344CB8AC3E}">
+        <p14:creationId xmlns:p14="http://schemas.microsoft.com/office/powerpoint/2010/main" val="3854763072"/>
+      </p:ext>
+    </p:extLst>
+  </p:cSld>
+  <p:clrMapOvr>
+    <a:masterClrMapping/>
+  </p:clrMapOvr>
+</p:sld>
+</file>
+
+<file path=ppt/slides/slide15.xml><?xml version="1.0" encoding="utf-8"?>
+<p:sld xmlns:a="http://schemas.openxmlformats.org/drawingml/2006/main" xmlns:r="http://schemas.openxmlformats.org/officeDocument/2006/relationships" xmlns:p="http://schemas.openxmlformats.org/presentationml/2006/main">
+  <p:cSld>
+    <p:spTree>
+      <p:nvGrpSpPr>
+        <p:cNvPr id="1" name=""/>
+        <p:cNvGrpSpPr/>
+        <p:nvPr/>
+      </p:nvGrpSpPr>
+      <p:grpSpPr>
+        <a:xfrm>
+          <a:off x="0" y="0"/>
+          <a:ext cx="0" cy="0"/>
+          <a:chOff x="0" y="0"/>
+          <a:chExt cx="0" cy="0"/>
+        </a:xfrm>
+      </p:grpSpPr>
+      <p:sp>
+        <p:nvSpPr>
+          <p:cNvPr id="2" name="Title 1">
+            <a:extLst>
+              <a:ext uri="{FF2B5EF4-FFF2-40B4-BE49-F238E27FC236}">
+                <a16:creationId xmlns:a16="http://schemas.microsoft.com/office/drawing/2014/main" id="{A00A8EBB-E3A7-024F-4DBC-F115012E147F}"/>
+              </a:ext>
+            </a:extLst>
+          </p:cNvPr>
+          <p:cNvSpPr>
+            <a:spLocks noGrp="1"/>
+          </p:cNvSpPr>
+          <p:nvPr>
+            <p:ph type="title"/>
+          </p:nvPr>
+        </p:nvSpPr>
+        <p:spPr/>
+        <p:txBody>
+          <a:bodyPr/>
+          <a:lstStyle/>
+          <a:p>
+            <a:r>
+              <a:rPr lang="en-US" dirty="0"/>
+              <a:t>Defining a DAG</a:t>
+            </a:r>
+          </a:p>
+        </p:txBody>
+      </p:sp>
+      <p:sp>
+        <p:nvSpPr>
+          <p:cNvPr id="3" name="Content Placeholder 2">
+            <a:extLst>
+              <a:ext uri="{FF2B5EF4-FFF2-40B4-BE49-F238E27FC236}">
+                <a16:creationId xmlns:a16="http://schemas.microsoft.com/office/drawing/2014/main" id="{C8C5FA98-BE27-9092-FBE3-AE9044602E3B}"/>
+              </a:ext>
+            </a:extLst>
+          </p:cNvPr>
+          <p:cNvSpPr>
+            <a:spLocks noGrp="1"/>
+          </p:cNvSpPr>
+          <p:nvPr>
+            <p:ph idx="1"/>
+          </p:nvPr>
+        </p:nvSpPr>
+        <p:spPr>
+          <a:xfrm>
+            <a:off x="581193" y="1878367"/>
+            <a:ext cx="11029615" cy="673448"/>
+          </a:xfrm>
+        </p:spPr>
+        <p:txBody>
+          <a:bodyPr>
+            <a:normAutofit fontScale="92500" lnSpcReduction="20000"/>
+          </a:bodyPr>
+          <a:lstStyle/>
+          <a:p>
+            <a:r>
+              <a:rPr lang="en-US" dirty="0"/>
+              <a:t>Use the @dag decorator </a:t>
+            </a:r>
+          </a:p>
+          <a:p>
+            <a:r>
+              <a:rPr lang="en-US" dirty="0" err="1"/>
+              <a:t>Dags</a:t>
+            </a:r>
+            <a:r>
+              <a:rPr lang="en-US" dirty="0"/>
+              <a:t> go in the ‘</a:t>
+            </a:r>
+            <a:r>
+              <a:rPr lang="en-US" dirty="0" err="1"/>
+              <a:t>dags’</a:t>
+            </a:r>
+            <a:r>
+              <a:rPr lang="en-US" dirty="0"/>
+              <a:t> folder </a:t>
+            </a:r>
+          </a:p>
+        </p:txBody>
+      </p:sp>
+      <p:pic>
+        <p:nvPicPr>
+          <p:cNvPr id="5" name="Picture 4">
+            <a:extLst>
+              <a:ext uri="{FF2B5EF4-FFF2-40B4-BE49-F238E27FC236}">
+                <a16:creationId xmlns:a16="http://schemas.microsoft.com/office/drawing/2014/main" id="{8151D877-642B-F73D-7BD9-4EEA602042E2}"/>
+              </a:ext>
+            </a:extLst>
+          </p:cNvPr>
+          <p:cNvPicPr>
+            <a:picLocks noChangeAspect="1"/>
+          </p:cNvPicPr>
+          <p:nvPr/>
+        </p:nvPicPr>
+        <p:blipFill>
+          <a:blip r:embed="rId2"/>
+          <a:stretch>
+            <a:fillRect/>
+          </a:stretch>
+        </p:blipFill>
+        <p:spPr>
+          <a:xfrm>
+            <a:off x="2022192" y="2714226"/>
+            <a:ext cx="8147615" cy="4133094"/>
+          </a:xfrm>
+          <a:prstGeom prst="rect">
+            <a:avLst/>
+          </a:prstGeom>
+        </p:spPr>
+      </p:pic>
+    </p:spTree>
+    <p:extLst>
+      <p:ext uri="{BB962C8B-B14F-4D97-AF65-F5344CB8AC3E}">
+        <p14:creationId xmlns:p14="http://schemas.microsoft.com/office/powerpoint/2010/main" val="2439736860"/>
+      </p:ext>
+    </p:extLst>
+  </p:cSld>
+  <p:clrMapOvr>
+    <a:masterClrMapping/>
+  </p:clrMapOvr>
+</p:sld>
+</file>
+
+<file path=ppt/slides/slide16.xml><?xml version="1.0" encoding="utf-8"?>
+<p:sld xmlns:a="http://schemas.openxmlformats.org/drawingml/2006/main" xmlns:r="http://schemas.openxmlformats.org/officeDocument/2006/relationships" xmlns:p="http://schemas.openxmlformats.org/presentationml/2006/main">
+  <p:cSld>
+    <p:spTree>
+      <p:nvGrpSpPr>
+        <p:cNvPr id="1" name=""/>
+        <p:cNvGrpSpPr/>
+        <p:nvPr/>
+      </p:nvGrpSpPr>
+      <p:grpSpPr>
+        <a:xfrm>
+          <a:off x="0" y="0"/>
+          <a:ext cx="0" cy="0"/>
+          <a:chOff x="0" y="0"/>
+          <a:chExt cx="0" cy="0"/>
+        </a:xfrm>
+      </p:grpSpPr>
+      <p:sp>
+        <p:nvSpPr>
+          <p:cNvPr id="2" name="Title 1">
+            <a:extLst>
+              <a:ext uri="{FF2B5EF4-FFF2-40B4-BE49-F238E27FC236}">
+                <a16:creationId xmlns:a16="http://schemas.microsoft.com/office/drawing/2014/main" id="{588840A7-A8A8-029C-6787-0E4B85DB46CD}"/>
+              </a:ext>
+            </a:extLst>
+          </p:cNvPr>
+          <p:cNvSpPr>
+            <a:spLocks noGrp="1"/>
+          </p:cNvSpPr>
+          <p:nvPr>
+            <p:ph type="title"/>
+          </p:nvPr>
+        </p:nvSpPr>
+        <p:spPr/>
+        <p:txBody>
+          <a:bodyPr/>
+          <a:lstStyle/>
+          <a:p>
+            <a:r>
+              <a:rPr lang="en-US" dirty="0"/>
+              <a:t>Adding connections</a:t>
+            </a:r>
+          </a:p>
+        </p:txBody>
+      </p:sp>
+      <p:sp>
+        <p:nvSpPr>
+          <p:cNvPr id="3" name="Content Placeholder 2">
+            <a:extLst>
+              <a:ext uri="{FF2B5EF4-FFF2-40B4-BE49-F238E27FC236}">
+                <a16:creationId xmlns:a16="http://schemas.microsoft.com/office/drawing/2014/main" id="{768EEC02-F3AC-2374-9EBF-4C30138C2319}"/>
+              </a:ext>
+            </a:extLst>
+          </p:cNvPr>
+          <p:cNvSpPr>
+            <a:spLocks noGrp="1"/>
+          </p:cNvSpPr>
+          <p:nvPr>
+            <p:ph idx="1"/>
+          </p:nvPr>
+        </p:nvSpPr>
+        <p:spPr>
+          <a:xfrm>
+            <a:off x="581193" y="2180496"/>
+            <a:ext cx="4584574" cy="3678303"/>
+          </a:xfrm>
+        </p:spPr>
+        <p:txBody>
+          <a:bodyPr/>
+          <a:lstStyle/>
+          <a:p>
+            <a:r>
+              <a:rPr lang="en-US" dirty="0"/>
+              <a:t>In Airflow UI we create connections to access databases, snowflake, etc. </a:t>
+            </a:r>
+          </a:p>
+          <a:p>
+            <a:r>
+              <a:rPr lang="en-US" dirty="0"/>
+              <a:t>Admin &gt; Connections </a:t>
+            </a:r>
+          </a:p>
+          <a:p>
+            <a:r>
+              <a:rPr lang="en-US" dirty="0"/>
+              <a:t>Note the matching connection ID from our last slide </a:t>
+            </a:r>
+          </a:p>
+        </p:txBody>
+      </p:sp>
+      <p:pic>
+        <p:nvPicPr>
+          <p:cNvPr id="5" name="Picture 4">
+            <a:extLst>
+              <a:ext uri="{FF2B5EF4-FFF2-40B4-BE49-F238E27FC236}">
+                <a16:creationId xmlns:a16="http://schemas.microsoft.com/office/drawing/2014/main" id="{B9FF9606-A4DC-A7BA-C87F-BBA20EA2841B}"/>
+              </a:ext>
+            </a:extLst>
+          </p:cNvPr>
+          <p:cNvPicPr>
+            <a:picLocks noChangeAspect="1"/>
+          </p:cNvPicPr>
+          <p:nvPr/>
+        </p:nvPicPr>
+        <p:blipFill>
+          <a:blip r:embed="rId2"/>
+          <a:stretch>
+            <a:fillRect/>
+          </a:stretch>
+        </p:blipFill>
+        <p:spPr>
+          <a:xfrm>
+            <a:off x="5545776" y="2180496"/>
+            <a:ext cx="6351920" cy="4193798"/>
+          </a:xfrm>
+          <a:prstGeom prst="rect">
+            <a:avLst/>
+          </a:prstGeom>
+        </p:spPr>
+      </p:pic>
+    </p:spTree>
+    <p:extLst>
+      <p:ext uri="{BB962C8B-B14F-4D97-AF65-F5344CB8AC3E}">
+        <p14:creationId xmlns:p14="http://schemas.microsoft.com/office/powerpoint/2010/main" val="3873804245"/>
+      </p:ext>
+    </p:extLst>
+  </p:cSld>
+  <p:clrMapOvr>
+    <a:masterClrMapping/>
+  </p:clrMapOvr>
+</p:sld>
+</file>
+
+<file path=ppt/slides/slide17.xml><?xml version="1.0" encoding="utf-8"?>
+<p:sld xmlns:a="http://schemas.openxmlformats.org/drawingml/2006/main" xmlns:r="http://schemas.openxmlformats.org/officeDocument/2006/relationships" xmlns:p="http://schemas.openxmlformats.org/presentationml/2006/main">
+  <p:cSld>
+    <p:spTree>
+      <p:nvGrpSpPr>
+        <p:cNvPr id="1" name=""/>
+        <p:cNvGrpSpPr/>
+        <p:nvPr/>
+      </p:nvGrpSpPr>
+      <p:grpSpPr>
+        <a:xfrm>
+          <a:off x="0" y="0"/>
+          <a:ext cx="0" cy="0"/>
+          <a:chOff x="0" y="0"/>
+          <a:chExt cx="0" cy="0"/>
+        </a:xfrm>
+      </p:grpSpPr>
+      <p:sp>
+        <p:nvSpPr>
+          <p:cNvPr id="2" name="Title 1">
+            <a:extLst>
+              <a:ext uri="{FF2B5EF4-FFF2-40B4-BE49-F238E27FC236}">
+                <a16:creationId xmlns:a16="http://schemas.microsoft.com/office/drawing/2014/main" id="{BE54A547-5F9C-29A9-FE2D-4A8295050101}"/>
+              </a:ext>
+            </a:extLst>
+          </p:cNvPr>
+          <p:cNvSpPr>
+            <a:spLocks noGrp="1"/>
+          </p:cNvSpPr>
+          <p:nvPr>
+            <p:ph type="title"/>
+          </p:nvPr>
+        </p:nvSpPr>
+        <p:spPr/>
+        <p:txBody>
+          <a:bodyPr/>
+          <a:lstStyle/>
+          <a:p>
+            <a:r>
+              <a:rPr lang="en-US" dirty="0"/>
+              <a:t>Providers</a:t>
+            </a:r>
+          </a:p>
+        </p:txBody>
+      </p:sp>
+      <p:sp>
+        <p:nvSpPr>
+          <p:cNvPr id="3" name="Content Placeholder 2">
+            <a:extLst>
+              <a:ext uri="{FF2B5EF4-FFF2-40B4-BE49-F238E27FC236}">
+                <a16:creationId xmlns:a16="http://schemas.microsoft.com/office/drawing/2014/main" id="{B1BD11B3-29F3-D216-2FC5-5E2BD0629456}"/>
+              </a:ext>
+            </a:extLst>
+          </p:cNvPr>
+          <p:cNvSpPr>
+            <a:spLocks noGrp="1"/>
+          </p:cNvSpPr>
+          <p:nvPr>
+            <p:ph idx="1"/>
+          </p:nvPr>
+        </p:nvSpPr>
+        <p:spPr>
+          <a:xfrm>
+            <a:off x="581192" y="2180496"/>
+            <a:ext cx="9211393" cy="3678303"/>
+          </a:xfrm>
+        </p:spPr>
+        <p:txBody>
+          <a:bodyPr/>
+          <a:lstStyle/>
+          <a:p>
+            <a:r>
+              <a:rPr lang="en-US" dirty="0"/>
+              <a:t>When adding connections, let’s say a technology is missing which you would like to integrate</a:t>
+            </a:r>
+          </a:p>
+          <a:p>
+            <a:r>
+              <a:rPr lang="en-US" dirty="0"/>
+              <a:t>We can extend the functionality of Airflow with Providers</a:t>
+            </a:r>
+          </a:p>
+          <a:p>
+            <a:r>
+              <a:rPr lang="en-US" dirty="0"/>
+              <a:t>These are essentially pip packages we would install to add the functionality </a:t>
+            </a:r>
+          </a:p>
+        </p:txBody>
+      </p:sp>
+      <p:sp>
+        <p:nvSpPr>
+          <p:cNvPr id="5" name="TextBox 4">
+            <a:extLst>
+              <a:ext uri="{FF2B5EF4-FFF2-40B4-BE49-F238E27FC236}">
+                <a16:creationId xmlns:a16="http://schemas.microsoft.com/office/drawing/2014/main" id="{87EBD27F-8A0D-4733-452D-709573E3F425}"/>
+              </a:ext>
+            </a:extLst>
+          </p:cNvPr>
+          <p:cNvSpPr txBox="1"/>
+          <p:nvPr/>
+        </p:nvSpPr>
+        <p:spPr>
+          <a:xfrm>
+            <a:off x="3047011" y="2180496"/>
+            <a:ext cx="6097978" cy="369332"/>
+          </a:xfrm>
+          <a:prstGeom prst="rect">
+            <a:avLst/>
+          </a:prstGeom>
+          <a:noFill/>
+        </p:spPr>
+        <p:txBody>
+          <a:bodyPr wrap="square">
+            <a:spAutoFit/>
+          </a:bodyPr>
+          <a:lstStyle/>
+          <a:p>
+            <a:r>
+              <a:rPr lang="en-US" dirty="0"/>
+              <a:t>https://airflow.apache.org/docs/apache-airflow-providers/</a:t>
+            </a:r>
+          </a:p>
+        </p:txBody>
+      </p:sp>
+    </p:spTree>
+    <p:extLst>
+      <p:ext uri="{BB962C8B-B14F-4D97-AF65-F5344CB8AC3E}">
+        <p14:creationId xmlns:p14="http://schemas.microsoft.com/office/powerpoint/2010/main" val="3788700038"/>
+      </p:ext>
+    </p:extLst>
+  </p:cSld>
+  <p:clrMapOvr>
+    <a:masterClrMapping/>
+  </p:clrMapOvr>
+</p:sld>
+</file>
+
+<file path=ppt/slides/slide18.xml><?xml version="1.0" encoding="utf-8"?>
+<p:sld xmlns:a="http://schemas.openxmlformats.org/drawingml/2006/main" xmlns:r="http://schemas.openxmlformats.org/officeDocument/2006/relationships" xmlns:p="http://schemas.openxmlformats.org/presentationml/2006/main">
+  <p:cSld>
+    <p:spTree>
+      <p:nvGrpSpPr>
+        <p:cNvPr id="1" name=""/>
+        <p:cNvGrpSpPr/>
+        <p:nvPr/>
+      </p:nvGrpSpPr>
+      <p:grpSpPr>
+        <a:xfrm>
+          <a:off x="0" y="0"/>
+          <a:ext cx="0" cy="0"/>
+          <a:chOff x="0" y="0"/>
+          <a:chExt cx="0" cy="0"/>
+        </a:xfrm>
+      </p:grpSpPr>
+      <p:sp>
+        <p:nvSpPr>
+          <p:cNvPr id="2" name="Title 1">
+            <a:extLst>
+              <a:ext uri="{FF2B5EF4-FFF2-40B4-BE49-F238E27FC236}">
+                <a16:creationId xmlns:a16="http://schemas.microsoft.com/office/drawing/2014/main" id="{E7D16B16-296C-E934-3A50-1CD044B6A4A5}"/>
+              </a:ext>
+            </a:extLst>
+          </p:cNvPr>
+          <p:cNvSpPr>
+            <a:spLocks noGrp="1"/>
+          </p:cNvSpPr>
+          <p:nvPr>
+            <p:ph type="title"/>
+          </p:nvPr>
+        </p:nvSpPr>
+        <p:spPr/>
+        <p:txBody>
+          <a:bodyPr/>
+          <a:lstStyle/>
+          <a:p>
+            <a:r>
+              <a:rPr lang="en-US" dirty="0"/>
+              <a:t>Test/schedule tasks directly </a:t>
+            </a:r>
+          </a:p>
+        </p:txBody>
+      </p:sp>
+      <p:sp>
+        <p:nvSpPr>
+          <p:cNvPr id="3" name="Content Placeholder 2">
+            <a:extLst>
+              <a:ext uri="{FF2B5EF4-FFF2-40B4-BE49-F238E27FC236}">
+                <a16:creationId xmlns:a16="http://schemas.microsoft.com/office/drawing/2014/main" id="{ECC040B1-CF43-EC66-027C-FBD92D9BDDB1}"/>
+              </a:ext>
+            </a:extLst>
+          </p:cNvPr>
+          <p:cNvSpPr>
+            <a:spLocks noGrp="1"/>
+          </p:cNvSpPr>
+          <p:nvPr>
+            <p:ph idx="1"/>
+          </p:nvPr>
+        </p:nvSpPr>
+        <p:spPr>
+          <a:xfrm>
+            <a:off x="581192" y="2180497"/>
+            <a:ext cx="11029615" cy="1013800"/>
+          </a:xfrm>
+        </p:spPr>
+        <p:txBody>
+          <a:bodyPr>
+            <a:normAutofit fontScale="92500" lnSpcReduction="20000"/>
+          </a:bodyPr>
+          <a:lstStyle/>
+          <a:p>
+            <a:r>
+              <a:rPr lang="en-US" dirty="0"/>
+              <a:t>On docker desktop, select the scheduler and then ‘Exec’</a:t>
+            </a:r>
+          </a:p>
+          <a:p>
+            <a:r>
+              <a:rPr lang="en-US" dirty="0"/>
+              <a:t>/bin/bash </a:t>
+            </a:r>
+            <a:r>
+              <a:rPr lang="en-US" dirty="0">
+                <a:sym typeface="Wingdings" panose="05000000000000000000" pitchFamily="2" charset="2"/>
+              </a:rPr>
+              <a:t> access to scheduler CLI</a:t>
+            </a:r>
+          </a:p>
+          <a:p>
+            <a:r>
+              <a:rPr lang="en-US" dirty="0">
+                <a:sym typeface="Wingdings" panose="05000000000000000000" pitchFamily="2" charset="2"/>
+              </a:rPr>
+              <a:t>Airflow tasks test &lt;</a:t>
+            </a:r>
+            <a:r>
+              <a:rPr lang="en-US" dirty="0" err="1">
+                <a:sym typeface="Wingdings" panose="05000000000000000000" pitchFamily="2" charset="2"/>
+              </a:rPr>
+              <a:t>dag_name</a:t>
+            </a:r>
+            <a:r>
+              <a:rPr lang="en-US" dirty="0">
+                <a:sym typeface="Wingdings" panose="05000000000000000000" pitchFamily="2" charset="2"/>
+              </a:rPr>
+              <a:t>&gt; &lt;</a:t>
+            </a:r>
+            <a:r>
+              <a:rPr lang="en-US" dirty="0" err="1">
+                <a:sym typeface="Wingdings" panose="05000000000000000000" pitchFamily="2" charset="2"/>
+              </a:rPr>
+              <a:t>task_id</a:t>
+            </a:r>
+            <a:r>
+              <a:rPr lang="en-US" dirty="0">
+                <a:sym typeface="Wingdings" panose="05000000000000000000" pitchFamily="2" charset="2"/>
+              </a:rPr>
+              <a:t>&gt;  test a task to see what will happen, it will not save the metadata </a:t>
+            </a:r>
+            <a:endParaRPr lang="en-US" dirty="0"/>
+          </a:p>
+        </p:txBody>
+      </p:sp>
+      <p:pic>
+        <p:nvPicPr>
+          <p:cNvPr id="5" name="Picture 4">
+            <a:extLst>
+              <a:ext uri="{FF2B5EF4-FFF2-40B4-BE49-F238E27FC236}">
+                <a16:creationId xmlns:a16="http://schemas.microsoft.com/office/drawing/2014/main" id="{BBD7EC79-DB77-63CF-51C0-3C414EC00CC4}"/>
+              </a:ext>
+            </a:extLst>
+          </p:cNvPr>
+          <p:cNvPicPr>
+            <a:picLocks noChangeAspect="1"/>
+          </p:cNvPicPr>
+          <p:nvPr/>
+        </p:nvPicPr>
+        <p:blipFill>
+          <a:blip r:embed="rId2"/>
+          <a:stretch>
+            <a:fillRect/>
+          </a:stretch>
+        </p:blipFill>
+        <p:spPr>
+          <a:xfrm>
+            <a:off x="1618625" y="3524693"/>
+            <a:ext cx="8954750" cy="3048425"/>
+          </a:xfrm>
+          <a:prstGeom prst="rect">
+            <a:avLst/>
+          </a:prstGeom>
+        </p:spPr>
+      </p:pic>
+    </p:spTree>
+    <p:extLst>
+      <p:ext uri="{BB962C8B-B14F-4D97-AF65-F5344CB8AC3E}">
+        <p14:creationId xmlns:p14="http://schemas.microsoft.com/office/powerpoint/2010/main" val="1917079402"/>
+      </p:ext>
+    </p:extLst>
+  </p:cSld>
+  <p:clrMapOvr>
+    <a:masterClrMapping/>
+  </p:clrMapOvr>
+</p:sld>
+</file>
+
+<file path=ppt/slides/slide19.xml><?xml version="1.0" encoding="utf-8"?>
+<p:sld xmlns:a="http://schemas.openxmlformats.org/drawingml/2006/main" xmlns:r="http://schemas.openxmlformats.org/officeDocument/2006/relationships" xmlns:p="http://schemas.openxmlformats.org/presentationml/2006/main">
+  <p:cSld>
+    <p:spTree>
+      <p:nvGrpSpPr>
+        <p:cNvPr id="1" name=""/>
+        <p:cNvGrpSpPr/>
+        <p:nvPr/>
+      </p:nvGrpSpPr>
+      <p:grpSpPr>
+        <a:xfrm>
+          <a:off x="0" y="0"/>
+          <a:ext cx="0" cy="0"/>
+          <a:chOff x="0" y="0"/>
+          <a:chExt cx="0" cy="0"/>
+        </a:xfrm>
+      </p:grpSpPr>
+      <p:sp>
+        <p:nvSpPr>
+          <p:cNvPr id="2" name="Title 1">
+            <a:extLst>
+              <a:ext uri="{FF2B5EF4-FFF2-40B4-BE49-F238E27FC236}">
+                <a16:creationId xmlns:a16="http://schemas.microsoft.com/office/drawing/2014/main" id="{4D788745-B221-7365-A544-CC7506320F40}"/>
+              </a:ext>
+            </a:extLst>
+          </p:cNvPr>
+          <p:cNvSpPr>
+            <a:spLocks noGrp="1"/>
+          </p:cNvSpPr>
+          <p:nvPr>
+            <p:ph type="title"/>
+          </p:nvPr>
+        </p:nvSpPr>
+        <p:spPr/>
+        <p:txBody>
+          <a:bodyPr/>
+          <a:lstStyle/>
+          <a:p>
+            <a:r>
+              <a:rPr lang="en-US" dirty="0"/>
+              <a:t>Check if an </a:t>
+            </a:r>
+            <a:r>
+              <a:rPr lang="en-US" dirty="0" err="1"/>
+              <a:t>api</a:t>
+            </a:r>
+            <a:r>
+              <a:rPr lang="en-US" dirty="0"/>
+              <a:t> is available </a:t>
+            </a:r>
+          </a:p>
+        </p:txBody>
+      </p:sp>
+      <p:sp>
+        <p:nvSpPr>
+          <p:cNvPr id="3" name="Content Placeholder 2">
+            <a:extLst>
+              <a:ext uri="{FF2B5EF4-FFF2-40B4-BE49-F238E27FC236}">
+                <a16:creationId xmlns:a16="http://schemas.microsoft.com/office/drawing/2014/main" id="{063AE918-E99F-50F0-3F78-EB0D7605BC95}"/>
+              </a:ext>
+            </a:extLst>
+          </p:cNvPr>
+          <p:cNvSpPr>
+            <a:spLocks noGrp="1"/>
+          </p:cNvSpPr>
+          <p:nvPr>
+            <p:ph idx="1"/>
+          </p:nvPr>
+        </p:nvSpPr>
+        <p:spPr>
+          <a:xfrm>
+            <a:off x="581192" y="2180496"/>
+            <a:ext cx="3746259" cy="3678303"/>
+          </a:xfrm>
+        </p:spPr>
+        <p:txBody>
+          <a:bodyPr/>
+          <a:lstStyle/>
+          <a:p>
+            <a:r>
+              <a:rPr lang="en-US" dirty="0"/>
+              <a:t>There are many other helpful sensors that may come out of the box, instead of making our own </a:t>
+            </a:r>
+          </a:p>
+          <a:p>
+            <a:r>
+              <a:rPr lang="en-US" dirty="0" err="1"/>
+              <a:t>HttpSensor</a:t>
+            </a:r>
+            <a:r>
+              <a:rPr lang="en-US" dirty="0"/>
+              <a:t>, </a:t>
+            </a:r>
+            <a:r>
+              <a:rPr lang="en-US" dirty="0" err="1"/>
+              <a:t>FileSensor</a:t>
+            </a:r>
+            <a:r>
+              <a:rPr lang="en-US" dirty="0"/>
+              <a:t>, S3KeySensor</a:t>
+            </a:r>
+          </a:p>
+        </p:txBody>
+      </p:sp>
+      <p:pic>
+        <p:nvPicPr>
+          <p:cNvPr id="5" name="Picture 4">
+            <a:extLst>
+              <a:ext uri="{FF2B5EF4-FFF2-40B4-BE49-F238E27FC236}">
+                <a16:creationId xmlns:a16="http://schemas.microsoft.com/office/drawing/2014/main" id="{3187C1F4-C795-F8A7-8DE1-B33B3B5F0CB5}"/>
+              </a:ext>
+            </a:extLst>
+          </p:cNvPr>
+          <p:cNvPicPr>
+            <a:picLocks noChangeAspect="1"/>
+          </p:cNvPicPr>
+          <p:nvPr/>
+        </p:nvPicPr>
+        <p:blipFill>
+          <a:blip r:embed="rId2"/>
+          <a:stretch>
+            <a:fillRect/>
+          </a:stretch>
+        </p:blipFill>
+        <p:spPr>
+          <a:xfrm>
+            <a:off x="5229976" y="1869189"/>
+            <a:ext cx="6083489" cy="4834432"/>
+          </a:xfrm>
+          <a:prstGeom prst="rect">
+            <a:avLst/>
+          </a:prstGeom>
+        </p:spPr>
+      </p:pic>
+    </p:spTree>
+    <p:extLst>
+      <p:ext uri="{BB962C8B-B14F-4D97-AF65-F5344CB8AC3E}">
+        <p14:creationId xmlns:p14="http://schemas.microsoft.com/office/powerpoint/2010/main" val="3108884496"/>
+      </p:ext>
+    </p:extLst>
+  </p:cSld>
+  <p:clrMapOvr>
+    <a:masterClrMapping/>
+  </p:clrMapOvr>
+</p:sld>
+</file>
+
+<file path=ppt/slides/slide2.xml><?xml version="1.0" encoding="utf-8"?>
+<p:sld xmlns:a="http://schemas.openxmlformats.org/drawingml/2006/main" xmlns:r="http://schemas.openxmlformats.org/officeDocument/2006/relationships" xmlns:p="http://schemas.openxmlformats.org/presentationml/2006/main">
+  <p:cSld>
+    <p:spTree>
+      <p:nvGrpSpPr>
+        <p:cNvPr id="1" name=""/>
+        <p:cNvGrpSpPr/>
+        <p:nvPr/>
+      </p:nvGrpSpPr>
+      <p:grpSpPr>
+        <a:xfrm>
+          <a:off x="0" y="0"/>
+          <a:ext cx="0" cy="0"/>
+          <a:chOff x="0" y="0"/>
+          <a:chExt cx="0" cy="0"/>
+        </a:xfrm>
+      </p:grpSpPr>
+      <p:sp>
+        <p:nvSpPr>
+          <p:cNvPr id="2" name="Title 1">
+            <a:extLst>
+              <a:ext uri="{FF2B5EF4-FFF2-40B4-BE49-F238E27FC236}">
+                <a16:creationId xmlns:a16="http://schemas.microsoft.com/office/drawing/2014/main" id="{402263A4-EA97-6B41-2683-417DA05CB6E2}"/>
+              </a:ext>
+            </a:extLst>
+          </p:cNvPr>
+          <p:cNvSpPr>
+            <a:spLocks noGrp="1"/>
+          </p:cNvSpPr>
+          <p:nvPr>
+            <p:ph type="title"/>
+          </p:nvPr>
+        </p:nvSpPr>
+        <p:spPr/>
+        <p:txBody>
+          <a:bodyPr/>
+          <a:lstStyle/>
+          <a:p>
+            <a:r>
+              <a:rPr lang="en-US" dirty="0"/>
+              <a:t>Prerequisites</a:t>
+            </a:r>
+          </a:p>
+        </p:txBody>
+      </p:sp>
+      <p:sp>
+        <p:nvSpPr>
+          <p:cNvPr id="3" name="Content Placeholder 2">
+            <a:extLst>
+              <a:ext uri="{FF2B5EF4-FFF2-40B4-BE49-F238E27FC236}">
+                <a16:creationId xmlns:a16="http://schemas.microsoft.com/office/drawing/2014/main" id="{222185DE-62EF-B7A6-2BD2-989F5F7FB037}"/>
+              </a:ext>
+            </a:extLst>
+          </p:cNvPr>
+          <p:cNvSpPr>
+            <a:spLocks noGrp="1"/>
+          </p:cNvSpPr>
+          <p:nvPr>
+            <p:ph idx="1"/>
+          </p:nvPr>
+        </p:nvSpPr>
+        <p:spPr/>
+        <p:txBody>
+          <a:bodyPr/>
+          <a:lstStyle/>
+          <a:p>
+            <a:r>
+              <a:rPr lang="en-US" dirty="0"/>
+              <a:t>Docker</a:t>
+            </a:r>
+          </a:p>
+          <a:p>
+            <a:r>
+              <a:rPr lang="en-US" dirty="0"/>
+              <a:t>Python</a:t>
+            </a:r>
+          </a:p>
+          <a:p>
+            <a:pPr lvl="1"/>
+            <a:r>
+              <a:rPr lang="en-US" dirty="0"/>
+              <a:t>Recommend </a:t>
+            </a:r>
+            <a:r>
+              <a:rPr lang="en-US" dirty="0" err="1"/>
+              <a:t>uv</a:t>
+            </a:r>
+            <a:r>
+              <a:rPr lang="en-US" dirty="0"/>
+              <a:t> for package management / build tool (installed in WSL)</a:t>
+            </a:r>
+          </a:p>
+          <a:p>
+            <a:pPr lvl="1"/>
+            <a:r>
+              <a:rPr lang="en-US" dirty="0"/>
+              <a:t>https://github.com/astral-sh/uv</a:t>
+            </a:r>
+          </a:p>
+        </p:txBody>
+      </p:sp>
+    </p:spTree>
+    <p:extLst>
+      <p:ext uri="{BB962C8B-B14F-4D97-AF65-F5344CB8AC3E}">
+        <p14:creationId xmlns:p14="http://schemas.microsoft.com/office/powerpoint/2010/main" val="3762928380"/>
+      </p:ext>
+    </p:extLst>
+  </p:cSld>
+  <p:clrMapOvr>
+    <a:masterClrMapping/>
+  </p:clrMapOvr>
+</p:sld>
+</file>
+
+<file path=ppt/slides/slide20.xml><?xml version="1.0" encoding="utf-8"?>
+<p:sld xmlns:a="http://schemas.openxmlformats.org/drawingml/2006/main" xmlns:r="http://schemas.openxmlformats.org/officeDocument/2006/relationships" xmlns:p="http://schemas.openxmlformats.org/presentationml/2006/main">
+  <p:cSld>
+    <p:spTree>
+      <p:nvGrpSpPr>
+        <p:cNvPr id="1" name=""/>
+        <p:cNvGrpSpPr/>
+        <p:nvPr/>
+      </p:nvGrpSpPr>
+      <p:grpSpPr>
+        <a:xfrm>
+          <a:off x="0" y="0"/>
+          <a:ext cx="0" cy="0"/>
+          <a:chOff x="0" y="0"/>
+          <a:chExt cx="0" cy="0"/>
+        </a:xfrm>
+      </p:grpSpPr>
+      <p:sp>
+        <p:nvSpPr>
+          <p:cNvPr id="2" name="Title 1">
+            <a:extLst>
+              <a:ext uri="{FF2B5EF4-FFF2-40B4-BE49-F238E27FC236}">
+                <a16:creationId xmlns:a16="http://schemas.microsoft.com/office/drawing/2014/main" id="{F57E9668-415F-3837-68E2-E929662CD68D}"/>
+              </a:ext>
+            </a:extLst>
+          </p:cNvPr>
+          <p:cNvSpPr>
+            <a:spLocks noGrp="1"/>
+          </p:cNvSpPr>
+          <p:nvPr>
+            <p:ph type="title"/>
+          </p:nvPr>
+        </p:nvSpPr>
+        <p:spPr/>
+        <p:txBody>
+          <a:bodyPr/>
+          <a:lstStyle/>
+          <a:p>
+            <a:r>
+              <a:rPr lang="en-US" dirty="0"/>
+              <a:t>Extracting data – classic way</a:t>
+            </a:r>
+          </a:p>
+        </p:txBody>
+      </p:sp>
+      <p:sp>
+        <p:nvSpPr>
+          <p:cNvPr id="3" name="Content Placeholder 2">
+            <a:extLst>
+              <a:ext uri="{FF2B5EF4-FFF2-40B4-BE49-F238E27FC236}">
+                <a16:creationId xmlns:a16="http://schemas.microsoft.com/office/drawing/2014/main" id="{14CD2909-B02C-4FB6-2DAE-AEC8A4A7C645}"/>
+              </a:ext>
+            </a:extLst>
+          </p:cNvPr>
+          <p:cNvSpPr>
+            <a:spLocks noGrp="1"/>
+          </p:cNvSpPr>
+          <p:nvPr>
+            <p:ph idx="1"/>
+          </p:nvPr>
+        </p:nvSpPr>
+        <p:spPr/>
+        <p:txBody>
+          <a:bodyPr/>
+          <a:lstStyle/>
+          <a:p>
+            <a:r>
+              <a:rPr lang="en-US" dirty="0"/>
+              <a:t>Please see ‘user_processing_old.py’ in course materials</a:t>
+            </a:r>
+          </a:p>
+        </p:txBody>
+      </p:sp>
+    </p:spTree>
+    <p:extLst>
+      <p:ext uri="{BB962C8B-B14F-4D97-AF65-F5344CB8AC3E}">
+        <p14:creationId xmlns:p14="http://schemas.microsoft.com/office/powerpoint/2010/main" val="4056419013"/>
+      </p:ext>
+    </p:extLst>
+  </p:cSld>
+  <p:clrMapOvr>
+    <a:masterClrMapping/>
+  </p:clrMapOvr>
+</p:sld>
+</file>
+
+<file path=ppt/slides/slide21.xml><?xml version="1.0" encoding="utf-8"?>
+<p:sld xmlns:a="http://schemas.openxmlformats.org/drawingml/2006/main" xmlns:r="http://schemas.openxmlformats.org/officeDocument/2006/relationships" xmlns:p="http://schemas.openxmlformats.org/presentationml/2006/main">
+  <p:cSld>
+    <p:spTree>
+      <p:nvGrpSpPr>
+        <p:cNvPr id="1" name=""/>
+        <p:cNvGrpSpPr/>
+        <p:nvPr/>
+      </p:nvGrpSpPr>
+      <p:grpSpPr>
+        <a:xfrm>
+          <a:off x="0" y="0"/>
+          <a:ext cx="0" cy="0"/>
+          <a:chOff x="0" y="0"/>
+          <a:chExt cx="0" cy="0"/>
+        </a:xfrm>
+      </p:grpSpPr>
+      <p:sp>
+        <p:nvSpPr>
+          <p:cNvPr id="2" name="Title 1">
+            <a:extLst>
+              <a:ext uri="{FF2B5EF4-FFF2-40B4-BE49-F238E27FC236}">
+                <a16:creationId xmlns:a16="http://schemas.microsoft.com/office/drawing/2014/main" id="{9FEE30BC-AF48-7159-9628-A7082A39D8A0}"/>
+              </a:ext>
+            </a:extLst>
+          </p:cNvPr>
+          <p:cNvSpPr>
+            <a:spLocks noGrp="1"/>
+          </p:cNvSpPr>
+          <p:nvPr>
+            <p:ph type="title"/>
+          </p:nvPr>
+        </p:nvSpPr>
+        <p:spPr/>
+        <p:txBody>
+          <a:bodyPr/>
+          <a:lstStyle/>
+          <a:p>
+            <a:r>
+              <a:rPr lang="en-US" dirty="0"/>
+              <a:t>Extract user as a task - without </a:t>
+            </a:r>
+            <a:r>
+              <a:rPr lang="en-US" dirty="0" err="1"/>
+              <a:t>pythonoperator</a:t>
+            </a:r>
+            <a:endParaRPr lang="en-US" dirty="0"/>
+          </a:p>
+        </p:txBody>
+      </p:sp>
+      <p:sp>
+        <p:nvSpPr>
+          <p:cNvPr id="3" name="Content Placeholder 2">
+            <a:extLst>
+              <a:ext uri="{FF2B5EF4-FFF2-40B4-BE49-F238E27FC236}">
+                <a16:creationId xmlns:a16="http://schemas.microsoft.com/office/drawing/2014/main" id="{1C4D8CFC-BAF6-3858-527D-7AC953EECBA1}"/>
+              </a:ext>
+            </a:extLst>
+          </p:cNvPr>
+          <p:cNvSpPr>
+            <a:spLocks noGrp="1"/>
+          </p:cNvSpPr>
+          <p:nvPr>
+            <p:ph idx="1"/>
+          </p:nvPr>
+        </p:nvSpPr>
+        <p:spPr/>
+        <p:txBody>
+          <a:bodyPr/>
+          <a:lstStyle/>
+          <a:p>
+            <a:r>
+              <a:rPr lang="en-US" dirty="0"/>
+              <a:t>Please see ‘user_processing.py’ in your course materials </a:t>
+            </a:r>
+          </a:p>
+          <a:p>
+            <a:r>
+              <a:rPr lang="en-US" dirty="0"/>
+              <a:t>Also note the new task to write the data to csv </a:t>
+            </a:r>
+          </a:p>
+          <a:p>
+            <a:r>
+              <a:rPr lang="en-US" dirty="0"/>
+              <a:t>Let’s install an airflow Hook to programmatically interact with our </a:t>
+            </a:r>
+            <a:r>
+              <a:rPr lang="en-US" dirty="0" err="1"/>
+              <a:t>db</a:t>
+            </a:r>
+            <a:r>
+              <a:rPr lang="en-US" dirty="0"/>
+              <a:t>:</a:t>
+            </a:r>
+          </a:p>
+        </p:txBody>
+      </p:sp>
+      <p:pic>
+        <p:nvPicPr>
+          <p:cNvPr id="5" name="Picture 4">
+            <a:extLst>
+              <a:ext uri="{FF2B5EF4-FFF2-40B4-BE49-F238E27FC236}">
+                <a16:creationId xmlns:a16="http://schemas.microsoft.com/office/drawing/2014/main" id="{D8368832-72F0-F176-1FC5-BB552407FD51}"/>
+              </a:ext>
+            </a:extLst>
+          </p:cNvPr>
+          <p:cNvPicPr>
+            <a:picLocks noChangeAspect="1"/>
+          </p:cNvPicPr>
+          <p:nvPr/>
+        </p:nvPicPr>
+        <p:blipFill>
+          <a:blip r:embed="rId2"/>
+          <a:stretch>
+            <a:fillRect/>
+          </a:stretch>
+        </p:blipFill>
+        <p:spPr>
+          <a:xfrm>
+            <a:off x="622033" y="4962436"/>
+            <a:ext cx="10947932" cy="356030"/>
+          </a:xfrm>
+          <a:prstGeom prst="rect">
+            <a:avLst/>
+          </a:prstGeom>
+        </p:spPr>
+      </p:pic>
+    </p:spTree>
+    <p:extLst>
+      <p:ext uri="{BB962C8B-B14F-4D97-AF65-F5344CB8AC3E}">
+        <p14:creationId xmlns:p14="http://schemas.microsoft.com/office/powerpoint/2010/main" val="1926983833"/>
+      </p:ext>
+    </p:extLst>
+  </p:cSld>
+  <p:clrMapOvr>
+    <a:masterClrMapping/>
+  </p:clrMapOvr>
+</p:sld>
+</file>
+
+<file path=ppt/slides/slide22.xml><?xml version="1.0" encoding="utf-8"?>
+<p:sld xmlns:a="http://schemas.openxmlformats.org/drawingml/2006/main" xmlns:r="http://schemas.openxmlformats.org/officeDocument/2006/relationships" xmlns:p="http://schemas.openxmlformats.org/presentationml/2006/main">
+  <p:cSld>
+    <p:spTree>
+      <p:nvGrpSpPr>
+        <p:cNvPr id="1" name=""/>
+        <p:cNvGrpSpPr/>
+        <p:nvPr/>
+      </p:nvGrpSpPr>
+      <p:grpSpPr>
+        <a:xfrm>
+          <a:off x="0" y="0"/>
+          <a:ext cx="0" cy="0"/>
+          <a:chOff x="0" y="0"/>
+          <a:chExt cx="0" cy="0"/>
+        </a:xfrm>
+      </p:grpSpPr>
+      <p:sp>
+        <p:nvSpPr>
+          <p:cNvPr id="2" name="Title 1">
+            <a:extLst>
+              <a:ext uri="{FF2B5EF4-FFF2-40B4-BE49-F238E27FC236}">
+                <a16:creationId xmlns:a16="http://schemas.microsoft.com/office/drawing/2014/main" id="{0A7185A9-9D91-E494-6A3A-06B6CFB9B3E7}"/>
+              </a:ext>
+            </a:extLst>
+          </p:cNvPr>
+          <p:cNvSpPr>
+            <a:spLocks noGrp="1"/>
+          </p:cNvSpPr>
+          <p:nvPr>
+            <p:ph type="title"/>
+          </p:nvPr>
+        </p:nvSpPr>
+        <p:spPr/>
+        <p:txBody>
+          <a:bodyPr/>
+          <a:lstStyle/>
+          <a:p>
+            <a:r>
+              <a:rPr lang="en-US" dirty="0"/>
+              <a:t>Cleaning up task dependencies</a:t>
+            </a:r>
+          </a:p>
+        </p:txBody>
+      </p:sp>
+      <p:pic>
+        <p:nvPicPr>
+          <p:cNvPr id="5" name="Content Placeholder 4">
+            <a:extLst>
+              <a:ext uri="{FF2B5EF4-FFF2-40B4-BE49-F238E27FC236}">
+                <a16:creationId xmlns:a16="http://schemas.microsoft.com/office/drawing/2014/main" id="{695DF5A7-C158-E04B-9928-BEBEE8B08400}"/>
+              </a:ext>
+            </a:extLst>
+          </p:cNvPr>
+          <p:cNvPicPr>
+            <a:picLocks noGrp="1" noChangeAspect="1"/>
+          </p:cNvPicPr>
+          <p:nvPr>
+            <p:ph idx="1"/>
+          </p:nvPr>
+        </p:nvPicPr>
+        <p:blipFill>
+          <a:blip r:embed="rId2"/>
+          <a:stretch>
+            <a:fillRect/>
+          </a:stretch>
+        </p:blipFill>
+        <p:spPr>
+          <a:xfrm>
+            <a:off x="2606527" y="2062473"/>
+            <a:ext cx="6978946" cy="4552084"/>
+          </a:xfrm>
+          <a:prstGeom prst="rect">
+            <a:avLst/>
+          </a:prstGeom>
+        </p:spPr>
+      </p:pic>
+    </p:spTree>
+    <p:extLst>
+      <p:ext uri="{BB962C8B-B14F-4D97-AF65-F5344CB8AC3E}">
+        <p14:creationId xmlns:p14="http://schemas.microsoft.com/office/powerpoint/2010/main" val="3435697278"/>
+      </p:ext>
+    </p:extLst>
+  </p:cSld>
+  <p:clrMapOvr>
+    <a:masterClrMapping/>
+  </p:clrMapOvr>
+</p:sld>
+</file>
+
+<file path=ppt/slides/slide23.xml><?xml version="1.0" encoding="utf-8"?>
+<p:sld xmlns:a="http://schemas.openxmlformats.org/drawingml/2006/main" xmlns:r="http://schemas.openxmlformats.org/officeDocument/2006/relationships" xmlns:p="http://schemas.openxmlformats.org/presentationml/2006/main">
+  <p:cSld>
+    <p:spTree>
+      <p:nvGrpSpPr>
+        <p:cNvPr id="1" name=""/>
+        <p:cNvGrpSpPr/>
+        <p:nvPr/>
+      </p:nvGrpSpPr>
+      <p:grpSpPr>
+        <a:xfrm>
+          <a:off x="0" y="0"/>
+          <a:ext cx="0" cy="0"/>
+          <a:chOff x="0" y="0"/>
+          <a:chExt cx="0" cy="0"/>
+        </a:xfrm>
+      </p:grpSpPr>
+      <p:sp>
+        <p:nvSpPr>
+          <p:cNvPr id="2" name="Title 1">
+            <a:extLst>
+              <a:ext uri="{FF2B5EF4-FFF2-40B4-BE49-F238E27FC236}">
+                <a16:creationId xmlns:a16="http://schemas.microsoft.com/office/drawing/2014/main" id="{B949A46C-0655-66E7-4ED5-5A00F455BA12}"/>
+              </a:ext>
+            </a:extLst>
+          </p:cNvPr>
+          <p:cNvSpPr>
+            <a:spLocks noGrp="1"/>
+          </p:cNvSpPr>
+          <p:nvPr>
+            <p:ph type="title"/>
+          </p:nvPr>
+        </p:nvSpPr>
+        <p:spPr/>
+        <p:txBody>
+          <a:bodyPr/>
+          <a:lstStyle/>
+          <a:p>
+            <a:r>
+              <a:rPr lang="en-US" dirty="0"/>
+              <a:t>Setting task dependencies</a:t>
+            </a:r>
+          </a:p>
+        </p:txBody>
+      </p:sp>
+      <p:pic>
+        <p:nvPicPr>
+          <p:cNvPr id="5" name="Picture 4">
+            <a:extLst>
+              <a:ext uri="{FF2B5EF4-FFF2-40B4-BE49-F238E27FC236}">
+                <a16:creationId xmlns:a16="http://schemas.microsoft.com/office/drawing/2014/main" id="{B336D4DB-DD1A-5C30-869F-45D88E559C0E}"/>
+              </a:ext>
+            </a:extLst>
+          </p:cNvPr>
+          <p:cNvPicPr>
+            <a:picLocks noChangeAspect="1"/>
+          </p:cNvPicPr>
+          <p:nvPr/>
+        </p:nvPicPr>
+        <p:blipFill>
+          <a:blip r:embed="rId2"/>
+          <a:stretch>
+            <a:fillRect/>
+          </a:stretch>
+        </p:blipFill>
+        <p:spPr>
+          <a:xfrm>
+            <a:off x="601485" y="2386940"/>
+            <a:ext cx="10989030" cy="3462730"/>
+          </a:xfrm>
+          <a:prstGeom prst="rect">
+            <a:avLst/>
+          </a:prstGeom>
+        </p:spPr>
+      </p:pic>
+    </p:spTree>
+    <p:extLst>
+      <p:ext uri="{BB962C8B-B14F-4D97-AF65-F5344CB8AC3E}">
+        <p14:creationId xmlns:p14="http://schemas.microsoft.com/office/powerpoint/2010/main" val="3149650038"/>
+      </p:ext>
+    </p:extLst>
+  </p:cSld>
+  <p:clrMapOvr>
+    <a:masterClrMapping/>
+  </p:clrMapOvr>
+</p:sld>
+</file>
+
+<file path=ppt/slides/slide24.xml><?xml version="1.0" encoding="utf-8"?>
+<p:sld xmlns:a="http://schemas.openxmlformats.org/drawingml/2006/main" xmlns:r="http://schemas.openxmlformats.org/officeDocument/2006/relationships" xmlns:p="http://schemas.openxmlformats.org/presentationml/2006/main">
+  <p:cSld>
+    <p:spTree>
+      <p:nvGrpSpPr>
+        <p:cNvPr id="1" name=""/>
+        <p:cNvGrpSpPr/>
+        <p:nvPr/>
+      </p:nvGrpSpPr>
+      <p:grpSpPr>
+        <a:xfrm>
+          <a:off x="0" y="0"/>
+          <a:ext cx="0" cy="0"/>
+          <a:chOff x="0" y="0"/>
+          <a:chExt cx="0" cy="0"/>
+        </a:xfrm>
+      </p:grpSpPr>
+      <p:sp>
+        <p:nvSpPr>
+          <p:cNvPr id="2" name="Title 1">
+            <a:extLst>
+              <a:ext uri="{FF2B5EF4-FFF2-40B4-BE49-F238E27FC236}">
+                <a16:creationId xmlns:a16="http://schemas.microsoft.com/office/drawing/2014/main" id="{5D29C442-C834-9973-1863-3C8327B326EF}"/>
+              </a:ext>
+            </a:extLst>
+          </p:cNvPr>
+          <p:cNvSpPr>
+            <a:spLocks noGrp="1"/>
+          </p:cNvSpPr>
+          <p:nvPr>
+            <p:ph type="title"/>
+          </p:nvPr>
+        </p:nvSpPr>
+        <p:spPr/>
+        <p:txBody>
+          <a:bodyPr/>
+          <a:lstStyle/>
+          <a:p>
+            <a:r>
+              <a:rPr lang="en-US" dirty="0"/>
+              <a:t>Assets</a:t>
+            </a:r>
+          </a:p>
+        </p:txBody>
+      </p:sp>
+      <p:sp>
+        <p:nvSpPr>
+          <p:cNvPr id="3" name="Content Placeholder 2">
+            <a:extLst>
+              <a:ext uri="{FF2B5EF4-FFF2-40B4-BE49-F238E27FC236}">
+                <a16:creationId xmlns:a16="http://schemas.microsoft.com/office/drawing/2014/main" id="{F2A93362-9010-70D7-1084-90787AC4C33F}"/>
+              </a:ext>
+            </a:extLst>
+          </p:cNvPr>
+          <p:cNvSpPr>
+            <a:spLocks noGrp="1"/>
+          </p:cNvSpPr>
+          <p:nvPr>
+            <p:ph idx="1"/>
+          </p:nvPr>
+        </p:nvSpPr>
+        <p:spPr>
+          <a:xfrm>
+            <a:off x="581193" y="2216122"/>
+            <a:ext cx="4822080" cy="3678303"/>
+          </a:xfrm>
+        </p:spPr>
+        <p:txBody>
+          <a:bodyPr/>
+          <a:lstStyle/>
+          <a:p>
+            <a:endParaRPr lang="en-US"/>
+          </a:p>
+        </p:txBody>
+      </p:sp>
+      <p:pic>
+        <p:nvPicPr>
+          <p:cNvPr id="5" name="Picture 4">
+            <a:extLst>
+              <a:ext uri="{FF2B5EF4-FFF2-40B4-BE49-F238E27FC236}">
+                <a16:creationId xmlns:a16="http://schemas.microsoft.com/office/drawing/2014/main" id="{EE6204D5-A1E5-8548-19C0-AA68EA615F27}"/>
+              </a:ext>
+            </a:extLst>
+          </p:cNvPr>
+          <p:cNvPicPr>
+            <a:picLocks noChangeAspect="1"/>
+          </p:cNvPicPr>
+          <p:nvPr/>
+        </p:nvPicPr>
+        <p:blipFill>
+          <a:blip r:embed="rId2"/>
+          <a:stretch>
+            <a:fillRect/>
+          </a:stretch>
+        </p:blipFill>
+        <p:spPr>
+          <a:xfrm>
+            <a:off x="5640779" y="2970844"/>
+            <a:ext cx="5559967" cy="2535628"/>
+          </a:xfrm>
+          <a:prstGeom prst="rect">
+            <a:avLst/>
+          </a:prstGeom>
+        </p:spPr>
+      </p:pic>
+    </p:spTree>
+    <p:extLst>
+      <p:ext uri="{BB962C8B-B14F-4D97-AF65-F5344CB8AC3E}">
+        <p14:creationId xmlns:p14="http://schemas.microsoft.com/office/powerpoint/2010/main" val="4148977728"/>
+      </p:ext>
+    </p:extLst>
+  </p:cSld>
+  <p:clrMapOvr>
+    <a:masterClrMapping/>
+  </p:clrMapOvr>
+</p:sld>
+</file>
+
+<file path=ppt/slides/slide25.xml><?xml version="1.0" encoding="utf-8"?>
+<p:sld xmlns:a="http://schemas.openxmlformats.org/drawingml/2006/main" xmlns:r="http://schemas.openxmlformats.org/officeDocument/2006/relationships" xmlns:p="http://schemas.openxmlformats.org/presentationml/2006/main">
+  <p:cSld>
+    <p:spTree>
+      <p:nvGrpSpPr>
+        <p:cNvPr id="1" name=""/>
+        <p:cNvGrpSpPr/>
+        <p:nvPr/>
+      </p:nvGrpSpPr>
+      <p:grpSpPr>
+        <a:xfrm>
+          <a:off x="0" y="0"/>
+          <a:ext cx="0" cy="0"/>
+          <a:chOff x="0" y="0"/>
+          <a:chExt cx="0" cy="0"/>
+        </a:xfrm>
+      </p:grpSpPr>
+      <p:sp>
+        <p:nvSpPr>
+          <p:cNvPr id="2" name="Title 1">
+            <a:extLst>
+              <a:ext uri="{FF2B5EF4-FFF2-40B4-BE49-F238E27FC236}">
+                <a16:creationId xmlns:a16="http://schemas.microsoft.com/office/drawing/2014/main" id="{78891D10-A974-EDC9-E83C-8FB668B4DA8A}"/>
+              </a:ext>
+            </a:extLst>
+          </p:cNvPr>
+          <p:cNvSpPr>
+            <a:spLocks noGrp="1"/>
+          </p:cNvSpPr>
+          <p:nvPr>
+            <p:ph type="title"/>
+          </p:nvPr>
+        </p:nvSpPr>
+        <p:spPr/>
+        <p:txBody>
+          <a:bodyPr/>
+          <a:lstStyle/>
+          <a:p>
+            <a:r>
+              <a:rPr lang="en-US" dirty="0"/>
+              <a:t>Working with dependent assets &amp; dependent </a:t>
+            </a:r>
+            <a:r>
+              <a:rPr lang="en-US" dirty="0" err="1"/>
+              <a:t>dags</a:t>
+            </a:r>
+            <a:endParaRPr lang="en-US" dirty="0"/>
+          </a:p>
+        </p:txBody>
+      </p:sp>
+      <p:pic>
+        <p:nvPicPr>
+          <p:cNvPr id="5" name="Content Placeholder 4">
+            <a:extLst>
+              <a:ext uri="{FF2B5EF4-FFF2-40B4-BE49-F238E27FC236}">
+                <a16:creationId xmlns:a16="http://schemas.microsoft.com/office/drawing/2014/main" id="{D013BE4B-2173-F118-8861-3B22BFBA39BD}"/>
+              </a:ext>
+            </a:extLst>
+          </p:cNvPr>
+          <p:cNvPicPr>
+            <a:picLocks noGrp="1" noChangeAspect="1"/>
+          </p:cNvPicPr>
+          <p:nvPr>
+            <p:ph idx="1"/>
+          </p:nvPr>
+        </p:nvPicPr>
+        <p:blipFill>
+          <a:blip r:embed="rId2"/>
+          <a:stretch>
+            <a:fillRect/>
+          </a:stretch>
+        </p:blipFill>
+        <p:spPr>
+          <a:xfrm>
+            <a:off x="1138177" y="1923052"/>
+            <a:ext cx="6899313" cy="4777600"/>
+          </a:xfrm>
+          <a:prstGeom prst="rect">
+            <a:avLst/>
+          </a:prstGeom>
+        </p:spPr>
+      </p:pic>
+      <p:sp>
+        <p:nvSpPr>
+          <p:cNvPr id="6" name="TextBox 5">
+            <a:extLst>
+              <a:ext uri="{FF2B5EF4-FFF2-40B4-BE49-F238E27FC236}">
+                <a16:creationId xmlns:a16="http://schemas.microsoft.com/office/drawing/2014/main" id="{54B5462E-683C-6302-8E75-54409456AB26}"/>
+              </a:ext>
+            </a:extLst>
+          </p:cNvPr>
+          <p:cNvSpPr txBox="1"/>
+          <p:nvPr/>
+        </p:nvSpPr>
+        <p:spPr>
+          <a:xfrm>
+            <a:off x="8336477" y="3664717"/>
+            <a:ext cx="3040083" cy="1477328"/>
+          </a:xfrm>
+          <a:prstGeom prst="rect">
+            <a:avLst/>
+          </a:prstGeom>
+          <a:noFill/>
+        </p:spPr>
+        <p:txBody>
+          <a:bodyPr wrap="square" rtlCol="0">
+            <a:spAutoFit/>
+          </a:bodyPr>
+          <a:lstStyle/>
+          <a:p>
+            <a:r>
+              <a:rPr lang="en-US" dirty="0"/>
+              <a:t>On the left is Airflow 2.x, and on the right is Airflow 3.x</a:t>
+            </a:r>
+          </a:p>
+          <a:p>
+            <a:endParaRPr lang="en-US" dirty="0"/>
+          </a:p>
+          <a:p>
+            <a:r>
+              <a:rPr lang="en-US" dirty="0"/>
+              <a:t>Airflow 2.x = Datasets </a:t>
+            </a:r>
+          </a:p>
+          <a:p>
+            <a:r>
+              <a:rPr lang="en-US" dirty="0"/>
+              <a:t>Airflow 3.x = Assets </a:t>
+            </a:r>
+          </a:p>
+        </p:txBody>
+      </p:sp>
+    </p:spTree>
+    <p:extLst>
+      <p:ext uri="{BB962C8B-B14F-4D97-AF65-F5344CB8AC3E}">
+        <p14:creationId xmlns:p14="http://schemas.microsoft.com/office/powerpoint/2010/main" val="1278410270"/>
+      </p:ext>
+    </p:extLst>
+  </p:cSld>
+  <p:clrMapOvr>
+    <a:masterClrMapping/>
+  </p:clrMapOvr>
+</p:sld>
+</file>
+
+<file path=ppt/slides/slide26.xml><?xml version="1.0" encoding="utf-8"?>
 <p:sld xmlns:a="http://schemas.openxmlformats.org/drawingml/2006/main" xmlns:r="http://schemas.openxmlformats.org/officeDocument/2006/relationships" xmlns:p="http://schemas.openxmlformats.org/presentationml/2006/main" show="0">
   <p:cSld>
     <p:spTree>
@@ -5017,120 +6659,6 @@
 </p:sld>
 </file>
 
-<file path=ppt/slides/slide2.xml><?xml version="1.0" encoding="utf-8"?>
-<p:sld xmlns:a="http://schemas.openxmlformats.org/drawingml/2006/main" xmlns:r="http://schemas.openxmlformats.org/officeDocument/2006/relationships" xmlns:p="http://schemas.openxmlformats.org/presentationml/2006/main">
-  <p:cSld>
-    <p:spTree>
-      <p:nvGrpSpPr>
-        <p:cNvPr id="1" name=""/>
-        <p:cNvGrpSpPr/>
-        <p:nvPr/>
-      </p:nvGrpSpPr>
-      <p:grpSpPr>
-        <a:xfrm>
-          <a:off x="0" y="0"/>
-          <a:ext cx="0" cy="0"/>
-          <a:chOff x="0" y="0"/>
-          <a:chExt cx="0" cy="0"/>
-        </a:xfrm>
-      </p:grpSpPr>
-      <p:sp>
-        <p:nvSpPr>
-          <p:cNvPr id="2" name="Title 1">
-            <a:extLst>
-              <a:ext uri="{FF2B5EF4-FFF2-40B4-BE49-F238E27FC236}">
-                <a16:creationId xmlns:a16="http://schemas.microsoft.com/office/drawing/2014/main" id="{402263A4-EA97-6B41-2683-417DA05CB6E2}"/>
-              </a:ext>
-            </a:extLst>
-          </p:cNvPr>
-          <p:cNvSpPr>
-            <a:spLocks noGrp="1"/>
-          </p:cNvSpPr>
-          <p:nvPr>
-            <p:ph type="title"/>
-          </p:nvPr>
-        </p:nvSpPr>
-        <p:spPr/>
-        <p:txBody>
-          <a:bodyPr/>
-          <a:lstStyle/>
-          <a:p>
-            <a:r>
-              <a:rPr lang="en-US" dirty="0"/>
-              <a:t>Prerequisites</a:t>
-            </a:r>
-          </a:p>
-        </p:txBody>
-      </p:sp>
-      <p:sp>
-        <p:nvSpPr>
-          <p:cNvPr id="3" name="Content Placeholder 2">
-            <a:extLst>
-              <a:ext uri="{FF2B5EF4-FFF2-40B4-BE49-F238E27FC236}">
-                <a16:creationId xmlns:a16="http://schemas.microsoft.com/office/drawing/2014/main" id="{222185DE-62EF-B7A6-2BD2-989F5F7FB037}"/>
-              </a:ext>
-            </a:extLst>
-          </p:cNvPr>
-          <p:cNvSpPr>
-            <a:spLocks noGrp="1"/>
-          </p:cNvSpPr>
-          <p:nvPr>
-            <p:ph idx="1"/>
-          </p:nvPr>
-        </p:nvSpPr>
-        <p:spPr/>
-        <p:txBody>
-          <a:bodyPr/>
-          <a:lstStyle/>
-          <a:p>
-            <a:r>
-              <a:rPr lang="en-US" dirty="0"/>
-              <a:t>Docker</a:t>
-            </a:r>
-          </a:p>
-          <a:p>
-            <a:r>
-              <a:rPr lang="en-US" dirty="0"/>
-              <a:t>Python</a:t>
-            </a:r>
-          </a:p>
-          <a:p>
-            <a:pPr lvl="1"/>
-            <a:r>
-              <a:rPr lang="en-US" dirty="0"/>
-              <a:t>Recommend </a:t>
-            </a:r>
-            <a:r>
-              <a:rPr lang="en-US" dirty="0" err="1"/>
-              <a:t>uv</a:t>
-            </a:r>
-            <a:r>
-              <a:rPr lang="en-US" dirty="0"/>
-              <a:t> for package management / build tool (installed in WSL)</a:t>
-            </a:r>
-          </a:p>
-          <a:p>
-            <a:pPr lvl="1"/>
-            <a:r>
-              <a:rPr lang="en-US" dirty="0"/>
-              <a:t>https://github.com/astral-sh/uv</a:t>
-            </a:r>
-          </a:p>
-        </p:txBody>
-      </p:sp>
-    </p:spTree>
-    <p:extLst>
-      <p:ext uri="{BB962C8B-B14F-4D97-AF65-F5344CB8AC3E}">
-        <p14:creationId xmlns:p14="http://schemas.microsoft.com/office/powerpoint/2010/main" val="3762928380"/>
-      </p:ext>
-    </p:extLst>
-  </p:cSld>
-  <p:clrMapOvr>
-    <a:masterClrMapping/>
-  </p:clrMapOvr>
-</p:sld>
-</file>
-
 <file path=ppt/slides/slide3.xml><?xml version="1.0" encoding="utf-8"?>
 <p:sld xmlns:a="http://schemas.openxmlformats.org/drawingml/2006/main" xmlns:r="http://schemas.openxmlformats.org/officeDocument/2006/relationships" xmlns:p="http://schemas.openxmlformats.org/presentationml/2006/main">
   <p:cSld>
@@ -5725,7 +7253,7 @@
             </a:r>
             <a:r>
               <a:rPr lang="en-US" dirty="0"/>
-              <a:t>– provides endpoints for task operations, i.e. start/stop tasks; Servers our UI </a:t>
+              <a:t>– provides endpoints for task operations, i.e. start/stop tasks; Serves our UI </a:t>
             </a:r>
           </a:p>
           <a:p>

--- a/airflow/Airflow.pptx
+++ b/airflow/Airflow.pptx
@@ -17,20 +17,22 @@
     <p:sldId id="315" r:id="rId11"/>
     <p:sldId id="316" r:id="rId12"/>
     <p:sldId id="317" r:id="rId13"/>
-    <p:sldId id="318" r:id="rId14"/>
-    <p:sldId id="327" r:id="rId15"/>
-    <p:sldId id="319" r:id="rId16"/>
-    <p:sldId id="320" r:id="rId17"/>
-    <p:sldId id="321" r:id="rId18"/>
-    <p:sldId id="322" r:id="rId19"/>
-    <p:sldId id="323" r:id="rId20"/>
-    <p:sldId id="324" r:id="rId21"/>
-    <p:sldId id="325" r:id="rId22"/>
-    <p:sldId id="326" r:id="rId23"/>
-    <p:sldId id="328" r:id="rId24"/>
-    <p:sldId id="329" r:id="rId25"/>
-    <p:sldId id="330" r:id="rId26"/>
-    <p:sldId id="262" r:id="rId27"/>
+    <p:sldId id="331" r:id="rId14"/>
+    <p:sldId id="318" r:id="rId15"/>
+    <p:sldId id="327" r:id="rId16"/>
+    <p:sldId id="319" r:id="rId17"/>
+    <p:sldId id="320" r:id="rId18"/>
+    <p:sldId id="321" r:id="rId19"/>
+    <p:sldId id="322" r:id="rId20"/>
+    <p:sldId id="323" r:id="rId21"/>
+    <p:sldId id="324" r:id="rId22"/>
+    <p:sldId id="325" r:id="rId23"/>
+    <p:sldId id="326" r:id="rId24"/>
+    <p:sldId id="328" r:id="rId25"/>
+    <p:sldId id="329" r:id="rId26"/>
+    <p:sldId id="330" r:id="rId27"/>
+    <p:sldId id="332" r:id="rId28"/>
+    <p:sldId id="262" r:id="rId29"/>
   </p:sldIdLst>
   <p:sldSz cx="12192000" cy="6858000"/>
   <p:notesSz cx="6858000" cy="9144000"/>
@@ -4409,6 +4411,121 @@
           <p:cNvPr id="2" name="Title 1">
             <a:extLst>
               <a:ext uri="{FF2B5EF4-FFF2-40B4-BE49-F238E27FC236}">
+                <a16:creationId xmlns:a16="http://schemas.microsoft.com/office/drawing/2014/main" id="{30B52A52-FC83-8D6E-8B72-08223560C0E3}"/>
+              </a:ext>
+            </a:extLst>
+          </p:cNvPr>
+          <p:cNvSpPr>
+            <a:spLocks noGrp="1"/>
+          </p:cNvSpPr>
+          <p:nvPr>
+            <p:ph type="title"/>
+          </p:nvPr>
+        </p:nvSpPr>
+        <p:spPr/>
+        <p:txBody>
+          <a:bodyPr/>
+          <a:lstStyle/>
+          <a:p>
+            <a:r>
+              <a:rPr lang="en-US" dirty="0"/>
+              <a:t>Running Airflow in the cloud</a:t>
+            </a:r>
+          </a:p>
+        </p:txBody>
+      </p:sp>
+      <p:sp>
+        <p:nvSpPr>
+          <p:cNvPr id="3" name="Content Placeholder 2">
+            <a:extLst>
+              <a:ext uri="{FF2B5EF4-FFF2-40B4-BE49-F238E27FC236}">
+                <a16:creationId xmlns:a16="http://schemas.microsoft.com/office/drawing/2014/main" id="{B4EB3CBC-935E-AB97-4B5F-2C2744E16281}"/>
+              </a:ext>
+            </a:extLst>
+          </p:cNvPr>
+          <p:cNvSpPr>
+            <a:spLocks noGrp="1"/>
+          </p:cNvSpPr>
+          <p:nvPr>
+            <p:ph idx="1"/>
+          </p:nvPr>
+        </p:nvSpPr>
+        <p:spPr/>
+        <p:txBody>
+          <a:bodyPr/>
+          <a:lstStyle/>
+          <a:p>
+            <a:r>
+              <a:rPr lang="en-US" dirty="0"/>
+              <a:t>Just like how Kafka could be run in the cloud with Amazon MSK, or </a:t>
+            </a:r>
+            <a:r>
+              <a:rPr lang="en-US" dirty="0" err="1"/>
+              <a:t>pyspark</a:t>
+            </a:r>
+            <a:r>
+              <a:rPr lang="en-US" dirty="0"/>
+              <a:t> could be run in the cloud with Amazon EMR, there are also managed cloud options for Airflow</a:t>
+            </a:r>
+          </a:p>
+          <a:p>
+            <a:r>
+              <a:rPr lang="en-US" dirty="0"/>
+              <a:t>The Amazon service for Airflow is called Amazon MWAA (managed workflows for Apache Airflow)</a:t>
+            </a:r>
+          </a:p>
+          <a:p>
+            <a:pPr lvl="1"/>
+            <a:r>
+              <a:rPr lang="en-US" dirty="0"/>
+              <a:t>You just write your </a:t>
+            </a:r>
+            <a:r>
+              <a:rPr lang="en-US" dirty="0" err="1"/>
+              <a:t>dags</a:t>
+            </a:r>
+            <a:r>
+              <a:rPr lang="en-US" dirty="0"/>
+              <a:t> and cluster management is handled for us</a:t>
+            </a:r>
+          </a:p>
+        </p:txBody>
+      </p:sp>
+    </p:spTree>
+    <p:extLst>
+      <p:ext uri="{BB962C8B-B14F-4D97-AF65-F5344CB8AC3E}">
+        <p14:creationId xmlns:p14="http://schemas.microsoft.com/office/powerpoint/2010/main" val="3395268844"/>
+      </p:ext>
+    </p:extLst>
+  </p:cSld>
+  <p:clrMapOvr>
+    <a:masterClrMapping/>
+  </p:clrMapOvr>
+</p:sld>
+</file>
+
+<file path=ppt/slides/slide14.xml><?xml version="1.0" encoding="utf-8"?>
+<p:sld xmlns:a="http://schemas.openxmlformats.org/drawingml/2006/main" xmlns:r="http://schemas.openxmlformats.org/officeDocument/2006/relationships" xmlns:p="http://schemas.openxmlformats.org/presentationml/2006/main">
+  <p:cSld>
+    <p:spTree>
+      <p:nvGrpSpPr>
+        <p:cNvPr id="1" name=""/>
+        <p:cNvGrpSpPr/>
+        <p:nvPr/>
+      </p:nvGrpSpPr>
+      <p:grpSpPr>
+        <a:xfrm>
+          <a:off x="0" y="0"/>
+          <a:ext cx="0" cy="0"/>
+          <a:chOff x="0" y="0"/>
+          <a:chExt cx="0" cy="0"/>
+        </a:xfrm>
+      </p:grpSpPr>
+      <p:sp>
+        <p:nvSpPr>
+          <p:cNvPr id="2" name="Title 1">
+            <a:extLst>
+              <a:ext uri="{FF2B5EF4-FFF2-40B4-BE49-F238E27FC236}">
                 <a16:creationId xmlns:a16="http://schemas.microsoft.com/office/drawing/2014/main" id="{A206A49E-2970-7C8A-235B-0366816B3115}"/>
               </a:ext>
             </a:extLst>
@@ -4630,7 +4747,7 @@
 </p:sld>
 </file>
 
-<file path=ppt/slides/slide14.xml><?xml version="1.0" encoding="utf-8"?>
+<file path=ppt/slides/slide15.xml><?xml version="1.0" encoding="utf-8"?>
 <p:sld xmlns:a="http://schemas.openxmlformats.org/drawingml/2006/main" xmlns:r="http://schemas.openxmlformats.org/officeDocument/2006/relationships" xmlns:p="http://schemas.openxmlformats.org/presentationml/2006/main">
   <p:cSld>
     <p:spTree>
@@ -4751,7 +4868,7 @@
 </p:sld>
 </file>
 
-<file path=ppt/slides/slide15.xml><?xml version="1.0" encoding="utf-8"?>
+<file path=ppt/slides/slide16.xml><?xml version="1.0" encoding="utf-8"?>
 <p:sld xmlns:a="http://schemas.openxmlformats.org/drawingml/2006/main" xmlns:r="http://schemas.openxmlformats.org/officeDocument/2006/relationships" xmlns:p="http://schemas.openxmlformats.org/presentationml/2006/main">
   <p:cSld>
     <p:spTree>
@@ -4892,7 +5009,7 @@
 </p:sld>
 </file>
 
-<file path=ppt/slides/slide16.xml><?xml version="1.0" encoding="utf-8"?>
+<file path=ppt/slides/slide17.xml><?xml version="1.0" encoding="utf-8"?>
 <p:sld xmlns:a="http://schemas.openxmlformats.org/drawingml/2006/main" xmlns:r="http://schemas.openxmlformats.org/officeDocument/2006/relationships" xmlns:p="http://schemas.openxmlformats.org/presentationml/2006/main">
   <p:cSld>
     <p:spTree>
@@ -5025,7 +5142,7 @@
 </p:sld>
 </file>
 
-<file path=ppt/slides/slide17.xml><?xml version="1.0" encoding="utf-8"?>
+<file path=ppt/slides/slide18.xml><?xml version="1.0" encoding="utf-8"?>
 <p:sld xmlns:a="http://schemas.openxmlformats.org/drawingml/2006/main" xmlns:r="http://schemas.openxmlformats.org/officeDocument/2006/relationships" xmlns:p="http://schemas.openxmlformats.org/presentationml/2006/main">
   <p:cSld>
     <p:spTree>
@@ -5163,7 +5280,7 @@
 </p:sld>
 </file>
 
-<file path=ppt/slides/slide18.xml><?xml version="1.0" encoding="utf-8"?>
+<file path=ppt/slides/slide19.xml><?xml version="1.0" encoding="utf-8"?>
 <p:sld xmlns:a="http://schemas.openxmlformats.org/drawingml/2006/main" xmlns:r="http://schemas.openxmlformats.org/officeDocument/2006/relationships" xmlns:p="http://schemas.openxmlformats.org/presentationml/2006/main">
   <p:cSld>
     <p:spTree>
@@ -5331,153 +5448,6 @@
 </p:sld>
 </file>
 
-<file path=ppt/slides/slide19.xml><?xml version="1.0" encoding="utf-8"?>
-<p:sld xmlns:a="http://schemas.openxmlformats.org/drawingml/2006/main" xmlns:r="http://schemas.openxmlformats.org/officeDocument/2006/relationships" xmlns:p="http://schemas.openxmlformats.org/presentationml/2006/main">
-  <p:cSld>
-    <p:spTree>
-      <p:nvGrpSpPr>
-        <p:cNvPr id="1" name=""/>
-        <p:cNvGrpSpPr/>
-        <p:nvPr/>
-      </p:nvGrpSpPr>
-      <p:grpSpPr>
-        <a:xfrm>
-          <a:off x="0" y="0"/>
-          <a:ext cx="0" cy="0"/>
-          <a:chOff x="0" y="0"/>
-          <a:chExt cx="0" cy="0"/>
-        </a:xfrm>
-      </p:grpSpPr>
-      <p:sp>
-        <p:nvSpPr>
-          <p:cNvPr id="2" name="Title 1">
-            <a:extLst>
-              <a:ext uri="{FF2B5EF4-FFF2-40B4-BE49-F238E27FC236}">
-                <a16:creationId xmlns:a16="http://schemas.microsoft.com/office/drawing/2014/main" id="{4D788745-B221-7365-A544-CC7506320F40}"/>
-              </a:ext>
-            </a:extLst>
-          </p:cNvPr>
-          <p:cNvSpPr>
-            <a:spLocks noGrp="1"/>
-          </p:cNvSpPr>
-          <p:nvPr>
-            <p:ph type="title"/>
-          </p:nvPr>
-        </p:nvSpPr>
-        <p:spPr/>
-        <p:txBody>
-          <a:bodyPr/>
-          <a:lstStyle/>
-          <a:p>
-            <a:r>
-              <a:rPr lang="en-US" dirty="0"/>
-              <a:t>Check if an </a:t>
-            </a:r>
-            <a:r>
-              <a:rPr lang="en-US" dirty="0" err="1"/>
-              <a:t>api</a:t>
-            </a:r>
-            <a:r>
-              <a:rPr lang="en-US" dirty="0"/>
-              <a:t> is available </a:t>
-            </a:r>
-          </a:p>
-        </p:txBody>
-      </p:sp>
-      <p:sp>
-        <p:nvSpPr>
-          <p:cNvPr id="3" name="Content Placeholder 2">
-            <a:extLst>
-              <a:ext uri="{FF2B5EF4-FFF2-40B4-BE49-F238E27FC236}">
-                <a16:creationId xmlns:a16="http://schemas.microsoft.com/office/drawing/2014/main" id="{063AE918-E99F-50F0-3F78-EB0D7605BC95}"/>
-              </a:ext>
-            </a:extLst>
-          </p:cNvPr>
-          <p:cNvSpPr>
-            <a:spLocks noGrp="1"/>
-          </p:cNvSpPr>
-          <p:nvPr>
-            <p:ph idx="1"/>
-          </p:nvPr>
-        </p:nvSpPr>
-        <p:spPr>
-          <a:xfrm>
-            <a:off x="581192" y="2180496"/>
-            <a:ext cx="3746259" cy="3678303"/>
-          </a:xfrm>
-        </p:spPr>
-        <p:txBody>
-          <a:bodyPr/>
-          <a:lstStyle/>
-          <a:p>
-            <a:r>
-              <a:rPr lang="en-US" dirty="0"/>
-              <a:t>There are many other helpful sensors that may come out of the box, instead of making our own </a:t>
-            </a:r>
-          </a:p>
-          <a:p>
-            <a:r>
-              <a:rPr lang="en-US" dirty="0" err="1"/>
-              <a:t>HttpSensor</a:t>
-            </a:r>
-            <a:r>
-              <a:rPr lang="en-US" dirty="0"/>
-              <a:t>, </a:t>
-            </a:r>
-            <a:r>
-              <a:rPr lang="en-US" dirty="0" err="1"/>
-              <a:t>FileSensor</a:t>
-            </a:r>
-            <a:r>
-              <a:rPr lang="en-US" dirty="0"/>
-              <a:t>, S3KeySensor</a:t>
-            </a:r>
-          </a:p>
-        </p:txBody>
-      </p:sp>
-      <p:pic>
-        <p:nvPicPr>
-          <p:cNvPr id="5" name="Picture 4">
-            <a:extLst>
-              <a:ext uri="{FF2B5EF4-FFF2-40B4-BE49-F238E27FC236}">
-                <a16:creationId xmlns:a16="http://schemas.microsoft.com/office/drawing/2014/main" id="{3187C1F4-C795-F8A7-8DE1-B33B3B5F0CB5}"/>
-              </a:ext>
-            </a:extLst>
-          </p:cNvPr>
-          <p:cNvPicPr>
-            <a:picLocks noChangeAspect="1"/>
-          </p:cNvPicPr>
-          <p:nvPr/>
-        </p:nvPicPr>
-        <p:blipFill>
-          <a:blip r:embed="rId2"/>
-          <a:stretch>
-            <a:fillRect/>
-          </a:stretch>
-        </p:blipFill>
-        <p:spPr>
-          <a:xfrm>
-            <a:off x="5229976" y="1869189"/>
-            <a:ext cx="6083489" cy="4834432"/>
-          </a:xfrm>
-          <a:prstGeom prst="rect">
-            <a:avLst/>
-          </a:prstGeom>
-        </p:spPr>
-      </p:pic>
-    </p:spTree>
-    <p:extLst>
-      <p:ext uri="{BB962C8B-B14F-4D97-AF65-F5344CB8AC3E}">
-        <p14:creationId xmlns:p14="http://schemas.microsoft.com/office/powerpoint/2010/main" val="3108884496"/>
-      </p:ext>
-    </p:extLst>
-  </p:cSld>
-  <p:clrMapOvr>
-    <a:masterClrMapping/>
-  </p:clrMapOvr>
-</p:sld>
-</file>
-
 <file path=ppt/slides/slide2.xml><?xml version="1.0" encoding="utf-8"?>
 <p:sld xmlns:a="http://schemas.openxmlformats.org/drawingml/2006/main" xmlns:r="http://schemas.openxmlformats.org/officeDocument/2006/relationships" xmlns:p="http://schemas.openxmlformats.org/presentationml/2006/main">
   <p:cSld>
@@ -5614,6 +5584,153 @@
           <p:cNvPr id="2" name="Title 1">
             <a:extLst>
               <a:ext uri="{FF2B5EF4-FFF2-40B4-BE49-F238E27FC236}">
+                <a16:creationId xmlns:a16="http://schemas.microsoft.com/office/drawing/2014/main" id="{4D788745-B221-7365-A544-CC7506320F40}"/>
+              </a:ext>
+            </a:extLst>
+          </p:cNvPr>
+          <p:cNvSpPr>
+            <a:spLocks noGrp="1"/>
+          </p:cNvSpPr>
+          <p:nvPr>
+            <p:ph type="title"/>
+          </p:nvPr>
+        </p:nvSpPr>
+        <p:spPr/>
+        <p:txBody>
+          <a:bodyPr/>
+          <a:lstStyle/>
+          <a:p>
+            <a:r>
+              <a:rPr lang="en-US" dirty="0"/>
+              <a:t>Check if an </a:t>
+            </a:r>
+            <a:r>
+              <a:rPr lang="en-US" dirty="0" err="1"/>
+              <a:t>api</a:t>
+            </a:r>
+            <a:r>
+              <a:rPr lang="en-US" dirty="0"/>
+              <a:t> is available </a:t>
+            </a:r>
+          </a:p>
+        </p:txBody>
+      </p:sp>
+      <p:sp>
+        <p:nvSpPr>
+          <p:cNvPr id="3" name="Content Placeholder 2">
+            <a:extLst>
+              <a:ext uri="{FF2B5EF4-FFF2-40B4-BE49-F238E27FC236}">
+                <a16:creationId xmlns:a16="http://schemas.microsoft.com/office/drawing/2014/main" id="{063AE918-E99F-50F0-3F78-EB0D7605BC95}"/>
+              </a:ext>
+            </a:extLst>
+          </p:cNvPr>
+          <p:cNvSpPr>
+            <a:spLocks noGrp="1"/>
+          </p:cNvSpPr>
+          <p:nvPr>
+            <p:ph idx="1"/>
+          </p:nvPr>
+        </p:nvSpPr>
+        <p:spPr>
+          <a:xfrm>
+            <a:off x="581192" y="2180496"/>
+            <a:ext cx="3746259" cy="3678303"/>
+          </a:xfrm>
+        </p:spPr>
+        <p:txBody>
+          <a:bodyPr/>
+          <a:lstStyle/>
+          <a:p>
+            <a:r>
+              <a:rPr lang="en-US" dirty="0"/>
+              <a:t>There are many other helpful sensors that may come out of the box, instead of making our own </a:t>
+            </a:r>
+          </a:p>
+          <a:p>
+            <a:r>
+              <a:rPr lang="en-US" dirty="0" err="1"/>
+              <a:t>HttpSensor</a:t>
+            </a:r>
+            <a:r>
+              <a:rPr lang="en-US" dirty="0"/>
+              <a:t>, </a:t>
+            </a:r>
+            <a:r>
+              <a:rPr lang="en-US" dirty="0" err="1"/>
+              <a:t>FileSensor</a:t>
+            </a:r>
+            <a:r>
+              <a:rPr lang="en-US" dirty="0"/>
+              <a:t>, S3KeySensor</a:t>
+            </a:r>
+          </a:p>
+        </p:txBody>
+      </p:sp>
+      <p:pic>
+        <p:nvPicPr>
+          <p:cNvPr id="5" name="Picture 4">
+            <a:extLst>
+              <a:ext uri="{FF2B5EF4-FFF2-40B4-BE49-F238E27FC236}">
+                <a16:creationId xmlns:a16="http://schemas.microsoft.com/office/drawing/2014/main" id="{3187C1F4-C795-F8A7-8DE1-B33B3B5F0CB5}"/>
+              </a:ext>
+            </a:extLst>
+          </p:cNvPr>
+          <p:cNvPicPr>
+            <a:picLocks noChangeAspect="1"/>
+          </p:cNvPicPr>
+          <p:nvPr/>
+        </p:nvPicPr>
+        <p:blipFill>
+          <a:blip r:embed="rId2"/>
+          <a:stretch>
+            <a:fillRect/>
+          </a:stretch>
+        </p:blipFill>
+        <p:spPr>
+          <a:xfrm>
+            <a:off x="5411973" y="2020117"/>
+            <a:ext cx="5486824" cy="4360274"/>
+          </a:xfrm>
+          <a:prstGeom prst="rect">
+            <a:avLst/>
+          </a:prstGeom>
+        </p:spPr>
+      </p:pic>
+    </p:spTree>
+    <p:extLst>
+      <p:ext uri="{BB962C8B-B14F-4D97-AF65-F5344CB8AC3E}">
+        <p14:creationId xmlns:p14="http://schemas.microsoft.com/office/powerpoint/2010/main" val="3108884496"/>
+      </p:ext>
+    </p:extLst>
+  </p:cSld>
+  <p:clrMapOvr>
+    <a:masterClrMapping/>
+  </p:clrMapOvr>
+</p:sld>
+</file>
+
+<file path=ppt/slides/slide21.xml><?xml version="1.0" encoding="utf-8"?>
+<p:sld xmlns:a="http://schemas.openxmlformats.org/drawingml/2006/main" xmlns:r="http://schemas.openxmlformats.org/officeDocument/2006/relationships" xmlns:p="http://schemas.openxmlformats.org/presentationml/2006/main">
+  <p:cSld>
+    <p:spTree>
+      <p:nvGrpSpPr>
+        <p:cNvPr id="1" name=""/>
+        <p:cNvGrpSpPr/>
+        <p:nvPr/>
+      </p:nvGrpSpPr>
+      <p:grpSpPr>
+        <a:xfrm>
+          <a:off x="0" y="0"/>
+          <a:ext cx="0" cy="0"/>
+          <a:chOff x="0" y="0"/>
+          <a:chExt cx="0" cy="0"/>
+        </a:xfrm>
+      </p:grpSpPr>
+      <p:sp>
+        <p:nvSpPr>
+          <p:cNvPr id="2" name="Title 1">
+            <a:extLst>
+              <a:ext uri="{FF2B5EF4-FFF2-40B4-BE49-F238E27FC236}">
                 <a16:creationId xmlns:a16="http://schemas.microsoft.com/office/drawing/2014/main" id="{F57E9668-415F-3837-68E2-E929662CD68D}"/>
               </a:ext>
             </a:extLst>
@@ -5678,7 +5795,7 @@
 </p:sld>
 </file>
 
-<file path=ppt/slides/slide21.xml><?xml version="1.0" encoding="utf-8"?>
+<file path=ppt/slides/slide22.xml><?xml version="1.0" encoding="utf-8"?>
 <p:sld xmlns:a="http://schemas.openxmlformats.org/drawingml/2006/main" xmlns:r="http://schemas.openxmlformats.org/officeDocument/2006/relationships" xmlns:p="http://schemas.openxmlformats.org/presentationml/2006/main">
   <p:cSld>
     <p:spTree>
@@ -5819,7 +5936,7 @@
 </p:sld>
 </file>
 
-<file path=ppt/slides/slide22.xml><?xml version="1.0" encoding="utf-8"?>
+<file path=ppt/slides/slide23.xml><?xml version="1.0" encoding="utf-8"?>
 <p:sld xmlns:a="http://schemas.openxmlformats.org/drawingml/2006/main" xmlns:r="http://schemas.openxmlformats.org/officeDocument/2006/relationships" xmlns:p="http://schemas.openxmlformats.org/presentationml/2006/main">
   <p:cSld>
     <p:spTree>
@@ -5909,7 +6026,7 @@
 </p:sld>
 </file>
 
-<file path=ppt/slides/slide23.xml><?xml version="1.0" encoding="utf-8"?>
+<file path=ppt/slides/slide24.xml><?xml version="1.0" encoding="utf-8"?>
 <p:sld xmlns:a="http://schemas.openxmlformats.org/drawingml/2006/main" xmlns:r="http://schemas.openxmlformats.org/officeDocument/2006/relationships" xmlns:p="http://schemas.openxmlformats.org/presentationml/2006/main">
   <p:cSld>
     <p:spTree>
@@ -5997,7 +6114,7 @@
 </p:sld>
 </file>
 
-<file path=ppt/slides/slide24.xml><?xml version="1.0" encoding="utf-8"?>
+<file path=ppt/slides/slide25.xml><?xml version="1.0" encoding="utf-8"?>
 <p:sld xmlns:a="http://schemas.openxmlformats.org/drawingml/2006/main" xmlns:r="http://schemas.openxmlformats.org/officeDocument/2006/relationships" xmlns:p="http://schemas.openxmlformats.org/presentationml/2006/main">
   <p:cSld>
     <p:spTree>
@@ -6068,7 +6185,37 @@
           <a:bodyPr/>
           <a:lstStyle/>
           <a:p>
-            <a:endParaRPr lang="en-US"/>
+            <a:r>
+              <a:rPr lang="en-US" dirty="0"/>
+              <a:t>Assets are a newer feature of Airflow 3.x</a:t>
+            </a:r>
+          </a:p>
+          <a:p>
+            <a:r>
+              <a:rPr lang="en-US" dirty="0"/>
+              <a:t>It is a mental shift from the task itself to what tasks produce </a:t>
+            </a:r>
+          </a:p>
+          <a:p>
+            <a:r>
+              <a:rPr lang="en-US" dirty="0"/>
+              <a:t>Task centric </a:t>
+            </a:r>
+            <a:r>
+              <a:rPr lang="en-US" dirty="0">
+                <a:sym typeface="Wingdings" panose="05000000000000000000" pitchFamily="2" charset="2"/>
+              </a:rPr>
+              <a:t> data centric orchestration</a:t>
+            </a:r>
+          </a:p>
+          <a:p>
+            <a:r>
+              <a:rPr lang="en-US" dirty="0">
+                <a:sym typeface="Wingdings" panose="05000000000000000000" pitchFamily="2" charset="2"/>
+              </a:rPr>
+              <a:t>Completed assets can trigger other workflows that may produce an asset themselves</a:t>
+            </a:r>
+            <a:endParaRPr lang="en-US" dirty="0"/>
           </a:p>
         </p:txBody>
       </p:sp>
@@ -6115,7 +6262,7 @@
 </p:sld>
 </file>
 
-<file path=ppt/slides/slide25.xml><?xml version="1.0" encoding="utf-8"?>
+<file path=ppt/slides/slide26.xml><?xml version="1.0" encoding="utf-8"?>
 <p:sld xmlns:a="http://schemas.openxmlformats.org/drawingml/2006/main" xmlns:r="http://schemas.openxmlformats.org/officeDocument/2006/relationships" xmlns:p="http://schemas.openxmlformats.org/presentationml/2006/main">
   <p:cSld>
     <p:spTree>
@@ -6260,7 +6407,93 @@
 </p:sld>
 </file>
 
-<file path=ppt/slides/slide26.xml><?xml version="1.0" encoding="utf-8"?>
+<file path=ppt/slides/slide27.xml><?xml version="1.0" encoding="utf-8"?>
+<p:sld xmlns:a="http://schemas.openxmlformats.org/drawingml/2006/main" xmlns:r="http://schemas.openxmlformats.org/officeDocument/2006/relationships" xmlns:p="http://schemas.openxmlformats.org/presentationml/2006/main">
+  <p:cSld>
+    <p:spTree>
+      <p:nvGrpSpPr>
+        <p:cNvPr id="1" name=""/>
+        <p:cNvGrpSpPr/>
+        <p:nvPr/>
+      </p:nvGrpSpPr>
+      <p:grpSpPr>
+        <a:xfrm>
+          <a:off x="0" y="0"/>
+          <a:ext cx="0" cy="0"/>
+          <a:chOff x="0" y="0"/>
+          <a:chExt cx="0" cy="0"/>
+        </a:xfrm>
+      </p:grpSpPr>
+      <p:sp>
+        <p:nvSpPr>
+          <p:cNvPr id="2" name="Title 1">
+            <a:extLst>
+              <a:ext uri="{FF2B5EF4-FFF2-40B4-BE49-F238E27FC236}">
+                <a16:creationId xmlns:a16="http://schemas.microsoft.com/office/drawing/2014/main" id="{28449A1C-653F-0856-BE31-BA0F32198D2C}"/>
+              </a:ext>
+            </a:extLst>
+          </p:cNvPr>
+          <p:cNvSpPr>
+            <a:spLocks noGrp="1"/>
+          </p:cNvSpPr>
+          <p:nvPr>
+            <p:ph type="title"/>
+          </p:nvPr>
+        </p:nvSpPr>
+        <p:spPr/>
+        <p:txBody>
+          <a:bodyPr/>
+          <a:lstStyle/>
+          <a:p>
+            <a:r>
+              <a:rPr lang="en-US" dirty="0"/>
+              <a:t>Walkthrough</a:t>
+            </a:r>
+          </a:p>
+        </p:txBody>
+      </p:sp>
+      <p:sp>
+        <p:nvSpPr>
+          <p:cNvPr id="3" name="Content Placeholder 2">
+            <a:extLst>
+              <a:ext uri="{FF2B5EF4-FFF2-40B4-BE49-F238E27FC236}">
+                <a16:creationId xmlns:a16="http://schemas.microsoft.com/office/drawing/2014/main" id="{6B0FD41F-0B1F-E54B-8B29-27773D37998A}"/>
+              </a:ext>
+            </a:extLst>
+          </p:cNvPr>
+          <p:cNvSpPr>
+            <a:spLocks noGrp="1"/>
+          </p:cNvSpPr>
+          <p:nvPr>
+            <p:ph idx="1"/>
+          </p:nvPr>
+        </p:nvSpPr>
+        <p:spPr/>
+        <p:txBody>
+          <a:bodyPr/>
+          <a:lstStyle/>
+          <a:p>
+            <a:r>
+              <a:rPr lang="en-US" dirty="0"/>
+              <a:t>Please see ‘user.py’ in your course materials</a:t>
+            </a:r>
+          </a:p>
+        </p:txBody>
+      </p:sp>
+    </p:spTree>
+    <p:extLst>
+      <p:ext uri="{BB962C8B-B14F-4D97-AF65-F5344CB8AC3E}">
+        <p14:creationId xmlns:p14="http://schemas.microsoft.com/office/powerpoint/2010/main" val="1169602075"/>
+      </p:ext>
+    </p:extLst>
+  </p:cSld>
+  <p:clrMapOvr>
+    <a:masterClrMapping/>
+  </p:clrMapOvr>
+</p:sld>
+</file>
+
+<file path=ppt/slides/slide28.xml><?xml version="1.0" encoding="utf-8"?>
 <p:sld xmlns:a="http://schemas.openxmlformats.org/drawingml/2006/main" xmlns:r="http://schemas.openxmlformats.org/officeDocument/2006/relationships" xmlns:p="http://schemas.openxmlformats.org/presentationml/2006/main" show="0">
   <p:cSld>
     <p:spTree>
